--- a/tests/text_vs_image/extraction/extraction_test.pptx
+++ b/tests/text_vs_image/extraction/extraction_test.pptx
@@ -3129,9 +3129,43 @@
           </a:p>
         </p:txBody>
       </p:sp>
+      <p:sp>
+        <p:nvSpPr>
+          <p:cNvPr id="3" name="TextBox 2"/>
+          <p:cNvSpPr txBox="1"/>
+          <p:nvPr/>
+        </p:nvSpPr>
+        <p:spPr>
+          <a:xfrm>
+            <a:off x="304800" y="571500"/>
+            <a:ext cx="14630400" cy="228600"/>
+          </a:xfrm>
+          <a:prstGeom prst="rect">
+            <a:avLst/>
+          </a:prstGeom>
+          <a:noFill/>
+        </p:spPr>
+        <p:txBody>
+          <a:bodyPr wrap="square" lIns="0" rIns="0" tIns="0" bIns="0">
+            <a:spAutoFit/>
+          </a:bodyPr>
+          <a:lstStyle/>
+          <a:p>
+            <a:pPr algn="l"/>
+            <a:r>
+              <a:rPr sz="1100" b="0">
+                <a:solidFill>
+                  <a:srgbClr val="6B7280"/>
+                </a:solidFill>
+              </a:rPr>
+              <a:t>勤怠管理 v3.2 - 田中太郎 | Screen-ID: TS-042</a:t>
+            </a:r>
+          </a:p>
+        </p:txBody>
+      </p:sp>
       <p:cxnSp>
         <p:nvCxnSpPr>
-          <p:cNvPr id="3" name="Connector 2"/>
+          <p:cNvPr id="4" name="Connector 3"/>
           <p:cNvCxnSpPr/>
           <p:nvPr/>
         </p:nvCxnSpPr>
@@ -3166,7 +3200,7 @@
       </p:cxnSp>
       <p:sp>
         <p:nvSpPr>
-          <p:cNvPr id="4" name="Rectangle 3"/>
+          <p:cNvPr id="5" name="Rectangle 4"/>
           <p:cNvSpPr/>
           <p:nvPr/>
         </p:nvSpPr>
@@ -3211,7 +3245,7 @@
       </p:sp>
       <p:sp>
         <p:nvSpPr>
-          <p:cNvPr id="5" name="Rectangle 4"/>
+          <p:cNvPr id="6" name="Rectangle 5"/>
           <p:cNvSpPr/>
           <p:nvPr/>
         </p:nvSpPr>
@@ -3256,7 +3290,7 @@
       </p:sp>
       <p:sp>
         <p:nvSpPr>
-          <p:cNvPr id="6" name="TextBox 5"/>
+          <p:cNvPr id="7" name="TextBox 6"/>
           <p:cNvSpPr txBox="1"/>
           <p:nvPr/>
         </p:nvSpPr>
@@ -3290,7 +3324,7 @@
       </p:sp>
       <p:sp>
         <p:nvSpPr>
-          <p:cNvPr id="7" name="TextBox 6"/>
+          <p:cNvPr id="8" name="TextBox 7"/>
           <p:cNvSpPr txBox="1"/>
           <p:nvPr/>
         </p:nvSpPr>
@@ -3324,7 +3358,7 @@
       </p:sp>
       <p:sp>
         <p:nvSpPr>
-          <p:cNvPr id="8" name="Rectangle 7"/>
+          <p:cNvPr id="9" name="Rectangle 8"/>
           <p:cNvSpPr/>
           <p:nvPr/>
         </p:nvSpPr>
@@ -3369,7 +3403,7 @@
       </p:sp>
       <p:sp>
         <p:nvSpPr>
-          <p:cNvPr id="9" name="TextBox 8"/>
+          <p:cNvPr id="10" name="TextBox 9"/>
           <p:cNvSpPr txBox="1"/>
           <p:nvPr/>
         </p:nvSpPr>
@@ -3403,7 +3437,7 @@
       </p:sp>
       <p:sp>
         <p:nvSpPr>
-          <p:cNvPr id="10" name="Rectangle 9"/>
+          <p:cNvPr id="11" name="Rectangle 10"/>
           <p:cNvSpPr/>
           <p:nvPr/>
         </p:nvSpPr>
@@ -3448,7 +3482,7 @@
       </p:sp>
       <p:sp>
         <p:nvSpPr>
-          <p:cNvPr id="11" name="TextBox 10"/>
+          <p:cNvPr id="12" name="TextBox 11"/>
           <p:cNvSpPr txBox="1"/>
           <p:nvPr/>
         </p:nvSpPr>
@@ -3482,7 +3516,7 @@
       </p:sp>
       <p:sp>
         <p:nvSpPr>
-          <p:cNvPr id="12" name="Rectangle 11"/>
+          <p:cNvPr id="13" name="Rectangle 12"/>
           <p:cNvSpPr/>
           <p:nvPr/>
         </p:nvSpPr>
@@ -3527,7 +3561,7 @@
       </p:sp>
       <p:sp>
         <p:nvSpPr>
-          <p:cNvPr id="13" name="TextBox 12"/>
+          <p:cNvPr id="14" name="TextBox 13"/>
           <p:cNvSpPr txBox="1"/>
           <p:nvPr/>
         </p:nvSpPr>
@@ -3561,7 +3595,7 @@
       </p:sp>
       <p:sp>
         <p:nvSpPr>
-          <p:cNvPr id="14" name="Rectangle 13"/>
+          <p:cNvPr id="15" name="Rectangle 14"/>
           <p:cNvSpPr/>
           <p:nvPr/>
         </p:nvSpPr>
@@ -3606,7 +3640,7 @@
       </p:sp>
       <p:sp>
         <p:nvSpPr>
-          <p:cNvPr id="15" name="TextBox 14"/>
+          <p:cNvPr id="16" name="TextBox 15"/>
           <p:cNvSpPr txBox="1"/>
           <p:nvPr/>
         </p:nvSpPr>
@@ -3640,7 +3674,7 @@
       </p:sp>
       <p:sp>
         <p:nvSpPr>
-          <p:cNvPr id="16" name="Rectangle 15"/>
+          <p:cNvPr id="17" name="Rectangle 16"/>
           <p:cNvSpPr/>
           <p:nvPr/>
         </p:nvSpPr>
@@ -3685,7 +3719,7 @@
       </p:sp>
       <p:sp>
         <p:nvSpPr>
-          <p:cNvPr id="17" name="TextBox 16"/>
+          <p:cNvPr id="18" name="TextBox 17"/>
           <p:cNvSpPr txBox="1"/>
           <p:nvPr/>
         </p:nvSpPr>
@@ -3719,7 +3753,7 @@
       </p:sp>
       <p:sp>
         <p:nvSpPr>
-          <p:cNvPr id="18" name="Rectangle 17"/>
+          <p:cNvPr id="19" name="Rectangle 18"/>
           <p:cNvSpPr/>
           <p:nvPr/>
         </p:nvSpPr>
@@ -3764,7 +3798,7 @@
       </p:sp>
       <p:sp>
         <p:nvSpPr>
-          <p:cNvPr id="19" name="TextBox 18"/>
+          <p:cNvPr id="20" name="TextBox 19"/>
           <p:cNvSpPr txBox="1"/>
           <p:nvPr/>
         </p:nvSpPr>
@@ -3798,7 +3832,7 @@
       </p:sp>
       <p:sp>
         <p:nvSpPr>
-          <p:cNvPr id="20" name="Rectangle 19"/>
+          <p:cNvPr id="21" name="Rectangle 20"/>
           <p:cNvSpPr/>
           <p:nvPr/>
         </p:nvSpPr>
@@ -3843,7 +3877,7 @@
       </p:sp>
       <p:sp>
         <p:nvSpPr>
-          <p:cNvPr id="21" name="TextBox 20"/>
+          <p:cNvPr id="22" name="TextBox 21"/>
           <p:cNvSpPr txBox="1"/>
           <p:nvPr/>
         </p:nvSpPr>
@@ -3877,7 +3911,7 @@
       </p:sp>
       <p:sp>
         <p:nvSpPr>
-          <p:cNvPr id="22" name="Rectangle 21"/>
+          <p:cNvPr id="23" name="Rectangle 22"/>
           <p:cNvSpPr/>
           <p:nvPr/>
         </p:nvSpPr>
@@ -3922,7 +3956,7 @@
       </p:sp>
       <p:sp>
         <p:nvSpPr>
-          <p:cNvPr id="23" name="TextBox 22"/>
+          <p:cNvPr id="24" name="TextBox 23"/>
           <p:cNvSpPr txBox="1"/>
           <p:nvPr/>
         </p:nvSpPr>
@@ -3956,7 +3990,7 @@
       </p:sp>
       <p:sp>
         <p:nvSpPr>
-          <p:cNvPr id="24" name="Rectangle 23"/>
+          <p:cNvPr id="25" name="Rectangle 24"/>
           <p:cNvSpPr/>
           <p:nvPr/>
         </p:nvSpPr>
@@ -4001,7 +4035,7 @@
       </p:sp>
       <p:sp>
         <p:nvSpPr>
-          <p:cNvPr id="25" name="TextBox 24"/>
+          <p:cNvPr id="26" name="TextBox 25"/>
           <p:cNvSpPr txBox="1"/>
           <p:nvPr/>
         </p:nvSpPr>
@@ -4035,7 +4069,7 @@
       </p:sp>
       <p:sp>
         <p:nvSpPr>
-          <p:cNvPr id="26" name="Rectangle 25"/>
+          <p:cNvPr id="27" name="Rectangle 26"/>
           <p:cNvSpPr/>
           <p:nvPr/>
         </p:nvSpPr>
@@ -4080,7 +4114,7 @@
       </p:sp>
       <p:sp>
         <p:nvSpPr>
-          <p:cNvPr id="27" name="TextBox 26"/>
+          <p:cNvPr id="28" name="TextBox 27"/>
           <p:cNvSpPr txBox="1"/>
           <p:nvPr/>
         </p:nvSpPr>
@@ -4114,7 +4148,7 @@
       </p:sp>
       <p:sp>
         <p:nvSpPr>
-          <p:cNvPr id="28" name="Rectangle 27"/>
+          <p:cNvPr id="29" name="Rectangle 28"/>
           <p:cNvSpPr/>
           <p:nvPr/>
         </p:nvSpPr>
@@ -4159,7 +4193,7 @@
       </p:sp>
       <p:sp>
         <p:nvSpPr>
-          <p:cNvPr id="29" name="TextBox 28"/>
+          <p:cNvPr id="30" name="TextBox 29"/>
           <p:cNvSpPr txBox="1"/>
           <p:nvPr/>
         </p:nvSpPr>
@@ -4193,7 +4227,7 @@
       </p:sp>
       <p:sp>
         <p:nvSpPr>
-          <p:cNvPr id="30" name="Rectangle 29"/>
+          <p:cNvPr id="31" name="Rectangle 30"/>
           <p:cNvSpPr/>
           <p:nvPr/>
         </p:nvSpPr>
@@ -4238,7 +4272,7 @@
       </p:sp>
       <p:sp>
         <p:nvSpPr>
-          <p:cNvPr id="31" name="TextBox 30"/>
+          <p:cNvPr id="32" name="TextBox 31"/>
           <p:cNvSpPr txBox="1"/>
           <p:nvPr/>
         </p:nvSpPr>
@@ -4272,7 +4306,7 @@
       </p:sp>
       <p:sp>
         <p:nvSpPr>
-          <p:cNvPr id="32" name="Rectangle 31"/>
+          <p:cNvPr id="33" name="Rectangle 32"/>
           <p:cNvSpPr/>
           <p:nvPr/>
         </p:nvSpPr>
@@ -4317,7 +4351,7 @@
       </p:sp>
       <p:sp>
         <p:nvSpPr>
-          <p:cNvPr id="33" name="TextBox 32"/>
+          <p:cNvPr id="34" name="TextBox 33"/>
           <p:cNvSpPr txBox="1"/>
           <p:nvPr/>
         </p:nvSpPr>
@@ -4351,7 +4385,7 @@
       </p:sp>
       <p:sp>
         <p:nvSpPr>
-          <p:cNvPr id="34" name="Rectangle 33"/>
+          <p:cNvPr id="35" name="Rectangle 34"/>
           <p:cNvSpPr/>
           <p:nvPr/>
         </p:nvSpPr>
@@ -4396,7 +4430,7 @@
       </p:sp>
       <p:sp>
         <p:nvSpPr>
-          <p:cNvPr id="35" name="TextBox 34"/>
+          <p:cNvPr id="36" name="TextBox 35"/>
           <p:cNvSpPr txBox="1"/>
           <p:nvPr/>
         </p:nvSpPr>
@@ -4430,7 +4464,7 @@
       </p:sp>
       <p:sp>
         <p:nvSpPr>
-          <p:cNvPr id="36" name="Rectangle 35"/>
+          <p:cNvPr id="37" name="Rectangle 36"/>
           <p:cNvSpPr/>
           <p:nvPr/>
         </p:nvSpPr>
@@ -4475,7 +4509,7 @@
       </p:sp>
       <p:sp>
         <p:nvSpPr>
-          <p:cNvPr id="37" name="TextBox 36"/>
+          <p:cNvPr id="38" name="TextBox 37"/>
           <p:cNvSpPr txBox="1"/>
           <p:nvPr/>
         </p:nvSpPr>
@@ -4509,7 +4543,7 @@
       </p:sp>
       <p:sp>
         <p:nvSpPr>
-          <p:cNvPr id="38" name="Rectangle 37"/>
+          <p:cNvPr id="39" name="Rectangle 38"/>
           <p:cNvSpPr/>
           <p:nvPr/>
         </p:nvSpPr>
@@ -4554,7 +4588,7 @@
       </p:sp>
       <p:sp>
         <p:nvSpPr>
-          <p:cNvPr id="39" name="TextBox 38"/>
+          <p:cNvPr id="40" name="TextBox 39"/>
           <p:cNvSpPr txBox="1"/>
           <p:nvPr/>
         </p:nvSpPr>
@@ -4588,7 +4622,7 @@
       </p:sp>
       <p:sp>
         <p:nvSpPr>
-          <p:cNvPr id="40" name="Rectangle 39"/>
+          <p:cNvPr id="41" name="Rectangle 40"/>
           <p:cNvSpPr/>
           <p:nvPr/>
         </p:nvSpPr>
@@ -4633,7 +4667,7 @@
       </p:sp>
       <p:sp>
         <p:nvSpPr>
-          <p:cNvPr id="41" name="TextBox 40"/>
+          <p:cNvPr id="42" name="TextBox 41"/>
           <p:cNvSpPr txBox="1"/>
           <p:nvPr/>
         </p:nvSpPr>
@@ -4667,7 +4701,7 @@
       </p:sp>
       <p:sp>
         <p:nvSpPr>
-          <p:cNvPr id="42" name="Rectangle 41"/>
+          <p:cNvPr id="43" name="Rectangle 42"/>
           <p:cNvSpPr/>
           <p:nvPr/>
         </p:nvSpPr>
@@ -4712,7 +4746,7 @@
       </p:sp>
       <p:sp>
         <p:nvSpPr>
-          <p:cNvPr id="43" name="TextBox 42"/>
+          <p:cNvPr id="44" name="TextBox 43"/>
           <p:cNvSpPr txBox="1"/>
           <p:nvPr/>
         </p:nvSpPr>
@@ -4746,7 +4780,7 @@
       </p:sp>
       <p:sp>
         <p:nvSpPr>
-          <p:cNvPr id="44" name="Rectangle 43"/>
+          <p:cNvPr id="45" name="Rectangle 44"/>
           <p:cNvSpPr/>
           <p:nvPr/>
         </p:nvSpPr>
@@ -4791,7 +4825,7 @@
       </p:sp>
       <p:sp>
         <p:nvSpPr>
-          <p:cNvPr id="45" name="TextBox 44"/>
+          <p:cNvPr id="46" name="TextBox 45"/>
           <p:cNvSpPr txBox="1"/>
           <p:nvPr/>
         </p:nvSpPr>
@@ -4825,7 +4859,7 @@
       </p:sp>
       <p:sp>
         <p:nvSpPr>
-          <p:cNvPr id="46" name="Rectangle 45"/>
+          <p:cNvPr id="47" name="Rectangle 46"/>
           <p:cNvSpPr/>
           <p:nvPr/>
         </p:nvSpPr>
@@ -4870,7 +4904,7 @@
       </p:sp>
       <p:sp>
         <p:nvSpPr>
-          <p:cNvPr id="47" name="TextBox 46"/>
+          <p:cNvPr id="48" name="TextBox 47"/>
           <p:cNvSpPr txBox="1"/>
           <p:nvPr/>
         </p:nvSpPr>
@@ -4904,7 +4938,7 @@
       </p:sp>
       <p:sp>
         <p:nvSpPr>
-          <p:cNvPr id="48" name="Rectangle 47"/>
+          <p:cNvPr id="49" name="Rectangle 48"/>
           <p:cNvSpPr/>
           <p:nvPr/>
         </p:nvSpPr>
@@ -4949,7 +4983,7 @@
       </p:sp>
       <p:sp>
         <p:nvSpPr>
-          <p:cNvPr id="49" name="TextBox 48"/>
+          <p:cNvPr id="50" name="TextBox 49"/>
           <p:cNvSpPr txBox="1"/>
           <p:nvPr/>
         </p:nvSpPr>
@@ -4983,7 +5017,7 @@
       </p:sp>
       <p:sp>
         <p:nvSpPr>
-          <p:cNvPr id="50" name="Rectangle 49"/>
+          <p:cNvPr id="51" name="Rectangle 50"/>
           <p:cNvSpPr/>
           <p:nvPr/>
         </p:nvSpPr>
@@ -5028,7 +5062,7 @@
       </p:sp>
       <p:sp>
         <p:nvSpPr>
-          <p:cNvPr id="51" name="TextBox 50"/>
+          <p:cNvPr id="52" name="TextBox 51"/>
           <p:cNvSpPr txBox="1"/>
           <p:nvPr/>
         </p:nvSpPr>
@@ -5062,7 +5096,7 @@
       </p:sp>
       <p:sp>
         <p:nvSpPr>
-          <p:cNvPr id="52" name="Rectangle 51"/>
+          <p:cNvPr id="53" name="Rectangle 52"/>
           <p:cNvSpPr/>
           <p:nvPr/>
         </p:nvSpPr>
@@ -5107,7 +5141,7 @@
       </p:sp>
       <p:sp>
         <p:nvSpPr>
-          <p:cNvPr id="53" name="TextBox 52"/>
+          <p:cNvPr id="54" name="TextBox 53"/>
           <p:cNvSpPr txBox="1"/>
           <p:nvPr/>
         </p:nvSpPr>
@@ -5141,7 +5175,7 @@
       </p:sp>
       <p:sp>
         <p:nvSpPr>
-          <p:cNvPr id="54" name="Rectangle 53"/>
+          <p:cNvPr id="55" name="Rectangle 54"/>
           <p:cNvSpPr/>
           <p:nvPr/>
         </p:nvSpPr>
@@ -5186,7 +5220,7 @@
       </p:sp>
       <p:sp>
         <p:nvSpPr>
-          <p:cNvPr id="55" name="TextBox 54"/>
+          <p:cNvPr id="56" name="TextBox 55"/>
           <p:cNvSpPr txBox="1"/>
           <p:nvPr/>
         </p:nvSpPr>
@@ -5220,7 +5254,7 @@
       </p:sp>
       <p:sp>
         <p:nvSpPr>
-          <p:cNvPr id="56" name="Rectangle 55"/>
+          <p:cNvPr id="57" name="Rectangle 56"/>
           <p:cNvSpPr/>
           <p:nvPr/>
         </p:nvSpPr>
@@ -5265,7 +5299,7 @@
       </p:sp>
       <p:sp>
         <p:nvSpPr>
-          <p:cNvPr id="57" name="TextBox 56"/>
+          <p:cNvPr id="58" name="TextBox 57"/>
           <p:cNvSpPr txBox="1"/>
           <p:nvPr/>
         </p:nvSpPr>
@@ -5299,7 +5333,7 @@
       </p:sp>
       <p:sp>
         <p:nvSpPr>
-          <p:cNvPr id="58" name="Rectangle 57"/>
+          <p:cNvPr id="59" name="Rectangle 58"/>
           <p:cNvSpPr/>
           <p:nvPr/>
         </p:nvSpPr>
@@ -5344,7 +5378,7 @@
       </p:sp>
       <p:sp>
         <p:nvSpPr>
-          <p:cNvPr id="59" name="TextBox 58"/>
+          <p:cNvPr id="60" name="TextBox 59"/>
           <p:cNvSpPr txBox="1"/>
           <p:nvPr/>
         </p:nvSpPr>
@@ -5378,7 +5412,7 @@
       </p:sp>
       <p:sp>
         <p:nvSpPr>
-          <p:cNvPr id="60" name="Rectangle 59"/>
+          <p:cNvPr id="61" name="Rectangle 60"/>
           <p:cNvSpPr/>
           <p:nvPr/>
         </p:nvSpPr>
@@ -5423,7 +5457,7 @@
       </p:sp>
       <p:sp>
         <p:nvSpPr>
-          <p:cNvPr id="61" name="TextBox 60"/>
+          <p:cNvPr id="62" name="TextBox 61"/>
           <p:cNvSpPr txBox="1"/>
           <p:nvPr/>
         </p:nvSpPr>
@@ -5457,7 +5491,7 @@
       </p:sp>
       <p:sp>
         <p:nvSpPr>
-          <p:cNvPr id="62" name="Rectangle 61"/>
+          <p:cNvPr id="63" name="Rectangle 62"/>
           <p:cNvSpPr/>
           <p:nvPr/>
         </p:nvSpPr>
@@ -5502,7 +5536,7 @@
       </p:sp>
       <p:sp>
         <p:nvSpPr>
-          <p:cNvPr id="63" name="TextBox 62"/>
+          <p:cNvPr id="64" name="TextBox 63"/>
           <p:cNvSpPr txBox="1"/>
           <p:nvPr/>
         </p:nvSpPr>
@@ -5536,7 +5570,7 @@
       </p:sp>
       <p:sp>
         <p:nvSpPr>
-          <p:cNvPr id="64" name="Rectangle 63"/>
+          <p:cNvPr id="65" name="Rectangle 64"/>
           <p:cNvSpPr/>
           <p:nvPr/>
         </p:nvSpPr>
@@ -5581,7 +5615,7 @@
       </p:sp>
       <p:sp>
         <p:nvSpPr>
-          <p:cNvPr id="65" name="TextBox 64"/>
+          <p:cNvPr id="66" name="TextBox 65"/>
           <p:cNvSpPr txBox="1"/>
           <p:nvPr/>
         </p:nvSpPr>
@@ -5615,7 +5649,7 @@
       </p:sp>
       <p:sp>
         <p:nvSpPr>
-          <p:cNvPr id="66" name="Rounded Rectangle 65"/>
+          <p:cNvPr id="67" name="Rounded Rectangle 66"/>
           <p:cNvSpPr/>
           <p:nvPr/>
         </p:nvSpPr>
@@ -5660,7 +5694,7 @@
       </p:sp>
       <p:sp>
         <p:nvSpPr>
-          <p:cNvPr id="67" name="TextBox 66"/>
+          <p:cNvPr id="68" name="TextBox 67"/>
           <p:cNvSpPr txBox="1"/>
           <p:nvPr/>
         </p:nvSpPr>
@@ -5694,7 +5728,7 @@
       </p:sp>
       <p:sp>
         <p:nvSpPr>
-          <p:cNvPr id="68" name="TextBox 67"/>
+          <p:cNvPr id="69" name="TextBox 68"/>
           <p:cNvSpPr txBox="1"/>
           <p:nvPr/>
         </p:nvSpPr>
@@ -5728,7 +5762,7 @@
       </p:sp>
       <p:sp>
         <p:nvSpPr>
-          <p:cNvPr id="69" name="Rounded Rectangle 68"/>
+          <p:cNvPr id="70" name="Rounded Rectangle 69"/>
           <p:cNvSpPr/>
           <p:nvPr/>
         </p:nvSpPr>
@@ -5773,7 +5807,7 @@
       </p:sp>
       <p:sp>
         <p:nvSpPr>
-          <p:cNvPr id="70" name="TextBox 69"/>
+          <p:cNvPr id="71" name="TextBox 70"/>
           <p:cNvSpPr txBox="1"/>
           <p:nvPr/>
         </p:nvSpPr>
@@ -5807,7 +5841,7 @@
       </p:sp>
       <p:sp>
         <p:nvSpPr>
-          <p:cNvPr id="71" name="TextBox 70"/>
+          <p:cNvPr id="72" name="TextBox 71"/>
           <p:cNvSpPr txBox="1"/>
           <p:nvPr/>
         </p:nvSpPr>
@@ -5841,7 +5875,7 @@
       </p:sp>
       <p:sp>
         <p:nvSpPr>
-          <p:cNvPr id="72" name="Rounded Rectangle 71"/>
+          <p:cNvPr id="73" name="Rounded Rectangle 72"/>
           <p:cNvSpPr/>
           <p:nvPr/>
         </p:nvSpPr>
@@ -5886,7 +5920,7 @@
       </p:sp>
       <p:sp>
         <p:nvSpPr>
-          <p:cNvPr id="73" name="TextBox 72"/>
+          <p:cNvPr id="74" name="TextBox 73"/>
           <p:cNvSpPr txBox="1"/>
           <p:nvPr/>
         </p:nvSpPr>
@@ -5920,7 +5954,7 @@
       </p:sp>
       <p:sp>
         <p:nvSpPr>
-          <p:cNvPr id="74" name="TextBox 73"/>
+          <p:cNvPr id="75" name="TextBox 74"/>
           <p:cNvSpPr txBox="1"/>
           <p:nvPr/>
         </p:nvSpPr>
@@ -5954,7 +5988,7 @@
       </p:sp>
       <p:sp>
         <p:nvSpPr>
-          <p:cNvPr id="75" name="Rounded Rectangle 74"/>
+          <p:cNvPr id="76" name="Rounded Rectangle 75"/>
           <p:cNvSpPr/>
           <p:nvPr/>
         </p:nvSpPr>
@@ -5999,7 +6033,7 @@
       </p:sp>
       <p:sp>
         <p:nvSpPr>
-          <p:cNvPr id="76" name="TextBox 75"/>
+          <p:cNvPr id="77" name="TextBox 76"/>
           <p:cNvSpPr txBox="1"/>
           <p:nvPr/>
         </p:nvSpPr>
@@ -6033,7 +6067,7 @@
       </p:sp>
       <p:sp>
         <p:nvSpPr>
-          <p:cNvPr id="77" name="TextBox 76"/>
+          <p:cNvPr id="78" name="TextBox 77"/>
           <p:cNvSpPr txBox="1"/>
           <p:nvPr/>
         </p:nvSpPr>
@@ -6061,6 +6095,40 @@
                 </a:solidFill>
               </a:rPr>
               <a:t>日付の曜日表示は不要 (括弧削除)</a:t>
+            </a:r>
+          </a:p>
+        </p:txBody>
+      </p:sp>
+      <p:sp>
+        <p:nvSpPr>
+          <p:cNvPr id="79" name="TextBox 78"/>
+          <p:cNvSpPr txBox="1"/>
+          <p:nvPr/>
+        </p:nvSpPr>
+        <p:spPr>
+          <a:xfrm>
+            <a:off x="304800" y="8343900"/>
+            <a:ext cx="14630400" cy="190500"/>
+          </a:xfrm>
+          <a:prstGeom prst="rect">
+            <a:avLst/>
+          </a:prstGeom>
+          <a:noFill/>
+        </p:spPr>
+        <p:txBody>
+          <a:bodyPr wrap="square" lIns="0" rIns="0" tIns="0" bIns="0">
+            <a:spAutoFit/>
+          </a:bodyPr>
+          <a:lstStyle/>
+          <a:p>
+            <a:pPr algn="l"/>
+            <a:r>
+              <a:rPr sz="900" b="0">
+                <a:solidFill>
+                  <a:srgbClr val="6B7280"/>
+                </a:solidFill>
+              </a:rPr>
+              <a:t>© 2026 ACME Corp. / Confidential</a:t>
             </a:r>
           </a:p>
         </p:txBody>
@@ -6117,9 +6185,43 @@
           </a:p>
         </p:txBody>
       </p:sp>
+      <p:sp>
+        <p:nvSpPr>
+          <p:cNvPr id="3" name="TextBox 2"/>
+          <p:cNvSpPr txBox="1"/>
+          <p:nvPr/>
+        </p:nvSpPr>
+        <p:spPr>
+          <a:xfrm>
+            <a:off x="304800" y="571500"/>
+            <a:ext cx="14630400" cy="228600"/>
+          </a:xfrm>
+          <a:prstGeom prst="rect">
+            <a:avLst/>
+          </a:prstGeom>
+          <a:noFill/>
+        </p:spPr>
+        <p:txBody>
+          <a:bodyPr wrap="square" lIns="0" rIns="0" tIns="0" bIns="0">
+            <a:spAutoFit/>
+          </a:bodyPr>
+          <a:lstStyle/>
+          <a:p>
+            <a:pPr algn="l"/>
+            <a:r>
+              <a:rPr sz="1100" b="0">
+                <a:solidFill>
+                  <a:srgbClr val="6B7280"/>
+                </a:solidFill>
+              </a:rPr>
+              <a:t>TICKET-8421 | Review: 2026-03-15 | 鈴木 (UX Lead)</a:t>
+            </a:r>
+          </a:p>
+        </p:txBody>
+      </p:sp>
       <p:cxnSp>
         <p:nvCxnSpPr>
-          <p:cNvPr id="3" name="Connector 2"/>
+          <p:cNvPr id="4" name="Connector 3"/>
           <p:cNvCxnSpPr/>
           <p:nvPr/>
         </p:nvCxnSpPr>
@@ -6154,7 +6256,7 @@
       </p:cxnSp>
       <p:sp>
         <p:nvSpPr>
-          <p:cNvPr id="4" name="Rectangle 3"/>
+          <p:cNvPr id="5" name="Rectangle 4"/>
           <p:cNvSpPr/>
           <p:nvPr/>
         </p:nvSpPr>
@@ -6199,7 +6301,7 @@
       </p:sp>
       <p:sp>
         <p:nvSpPr>
-          <p:cNvPr id="5" name="Rectangle 4"/>
+          <p:cNvPr id="6" name="Rectangle 5"/>
           <p:cNvSpPr/>
           <p:nvPr/>
         </p:nvSpPr>
@@ -6244,7 +6346,7 @@
       </p:sp>
       <p:sp>
         <p:nvSpPr>
-          <p:cNvPr id="6" name="TextBox 5"/>
+          <p:cNvPr id="7" name="TextBox 6"/>
           <p:cNvSpPr txBox="1"/>
           <p:nvPr/>
         </p:nvSpPr>
@@ -6278,7 +6380,7 @@
       </p:sp>
       <p:sp>
         <p:nvSpPr>
-          <p:cNvPr id="7" name="Rectangle 6"/>
+          <p:cNvPr id="8" name="Rectangle 7"/>
           <p:cNvSpPr/>
           <p:nvPr/>
         </p:nvSpPr>
@@ -6323,7 +6425,7 @@
       </p:sp>
       <p:sp>
         <p:nvSpPr>
-          <p:cNvPr id="8" name="TextBox 7"/>
+          <p:cNvPr id="9" name="TextBox 8"/>
           <p:cNvSpPr txBox="1"/>
           <p:nvPr/>
         </p:nvSpPr>
@@ -6357,7 +6459,7 @@
       </p:sp>
       <p:sp>
         <p:nvSpPr>
-          <p:cNvPr id="9" name="Rectangle 8"/>
+          <p:cNvPr id="10" name="Rectangle 9"/>
           <p:cNvSpPr/>
           <p:nvPr/>
         </p:nvSpPr>
@@ -6402,7 +6504,7 @@
       </p:sp>
       <p:sp>
         <p:nvSpPr>
-          <p:cNvPr id="10" name="TextBox 9"/>
+          <p:cNvPr id="11" name="TextBox 10"/>
           <p:cNvSpPr txBox="1"/>
           <p:nvPr/>
         </p:nvSpPr>
@@ -6436,7 +6538,7 @@
       </p:sp>
       <p:sp>
         <p:nvSpPr>
-          <p:cNvPr id="11" name="Rectangle 10"/>
+          <p:cNvPr id="12" name="Rectangle 11"/>
           <p:cNvSpPr/>
           <p:nvPr/>
         </p:nvSpPr>
@@ -6481,7 +6583,7 @@
       </p:sp>
       <p:sp>
         <p:nvSpPr>
-          <p:cNvPr id="12" name="TextBox 11"/>
+          <p:cNvPr id="13" name="TextBox 12"/>
           <p:cNvSpPr txBox="1"/>
           <p:nvPr/>
         </p:nvSpPr>
@@ -6515,7 +6617,7 @@
       </p:sp>
       <p:sp>
         <p:nvSpPr>
-          <p:cNvPr id="13" name="TextBox 12"/>
+          <p:cNvPr id="14" name="TextBox 13"/>
           <p:cNvSpPr txBox="1"/>
           <p:nvPr/>
         </p:nvSpPr>
@@ -6549,7 +6651,7 @@
       </p:sp>
       <p:sp>
         <p:nvSpPr>
-          <p:cNvPr id="14" name="Rectangle 13"/>
+          <p:cNvPr id="15" name="Rectangle 14"/>
           <p:cNvSpPr/>
           <p:nvPr/>
         </p:nvSpPr>
@@ -6594,7 +6696,7 @@
       </p:sp>
       <p:sp>
         <p:nvSpPr>
-          <p:cNvPr id="15" name="Rectangle 14"/>
+          <p:cNvPr id="16" name="Rectangle 15"/>
           <p:cNvSpPr/>
           <p:nvPr/>
         </p:nvSpPr>
@@ -6639,7 +6741,7 @@
       </p:sp>
       <p:sp>
         <p:nvSpPr>
-          <p:cNvPr id="16" name="TextBox 15"/>
+          <p:cNvPr id="17" name="TextBox 16"/>
           <p:cNvSpPr txBox="1"/>
           <p:nvPr/>
         </p:nvSpPr>
@@ -6673,7 +6775,7 @@
       </p:sp>
       <p:sp>
         <p:nvSpPr>
-          <p:cNvPr id="17" name="Rectangle 16"/>
+          <p:cNvPr id="18" name="Rectangle 17"/>
           <p:cNvSpPr/>
           <p:nvPr/>
         </p:nvSpPr>
@@ -6718,7 +6820,7 @@
       </p:sp>
       <p:sp>
         <p:nvSpPr>
-          <p:cNvPr id="18" name="TextBox 17"/>
+          <p:cNvPr id="19" name="TextBox 18"/>
           <p:cNvSpPr txBox="1"/>
           <p:nvPr/>
         </p:nvSpPr>
@@ -6752,7 +6854,7 @@
       </p:sp>
       <p:sp>
         <p:nvSpPr>
-          <p:cNvPr id="19" name="Rectangle 18"/>
+          <p:cNvPr id="20" name="Rectangle 19"/>
           <p:cNvSpPr/>
           <p:nvPr/>
         </p:nvSpPr>
@@ -6797,7 +6899,7 @@
       </p:sp>
       <p:sp>
         <p:nvSpPr>
-          <p:cNvPr id="20" name="TextBox 19"/>
+          <p:cNvPr id="21" name="TextBox 20"/>
           <p:cNvSpPr txBox="1"/>
           <p:nvPr/>
         </p:nvSpPr>
@@ -6831,7 +6933,7 @@
       </p:sp>
       <p:sp>
         <p:nvSpPr>
-          <p:cNvPr id="21" name="Rectangle 20"/>
+          <p:cNvPr id="22" name="Rectangle 21"/>
           <p:cNvSpPr/>
           <p:nvPr/>
         </p:nvSpPr>
@@ -6876,7 +6978,7 @@
       </p:sp>
       <p:sp>
         <p:nvSpPr>
-          <p:cNvPr id="22" name="Rectangle 21"/>
+          <p:cNvPr id="23" name="Rectangle 22"/>
           <p:cNvSpPr/>
           <p:nvPr/>
         </p:nvSpPr>
@@ -6921,7 +7023,7 @@
       </p:sp>
       <p:sp>
         <p:nvSpPr>
-          <p:cNvPr id="23" name="Rectangle 22"/>
+          <p:cNvPr id="24" name="Rectangle 23"/>
           <p:cNvSpPr/>
           <p:nvPr/>
         </p:nvSpPr>
@@ -6966,7 +7068,7 @@
       </p:sp>
       <p:sp>
         <p:nvSpPr>
-          <p:cNvPr id="24" name="TextBox 23"/>
+          <p:cNvPr id="25" name="TextBox 24"/>
           <p:cNvSpPr txBox="1"/>
           <p:nvPr/>
         </p:nvSpPr>
@@ -7000,7 +7102,7 @@
       </p:sp>
       <p:sp>
         <p:nvSpPr>
-          <p:cNvPr id="25" name="TextBox 24"/>
+          <p:cNvPr id="26" name="TextBox 25"/>
           <p:cNvSpPr txBox="1"/>
           <p:nvPr/>
         </p:nvSpPr>
@@ -7034,7 +7136,7 @@
       </p:sp>
       <p:sp>
         <p:nvSpPr>
-          <p:cNvPr id="26" name="Rectangle 25"/>
+          <p:cNvPr id="27" name="Rectangle 26"/>
           <p:cNvSpPr/>
           <p:nvPr/>
         </p:nvSpPr>
@@ -7079,7 +7181,7 @@
       </p:sp>
       <p:sp>
         <p:nvSpPr>
-          <p:cNvPr id="27" name="TextBox 26"/>
+          <p:cNvPr id="28" name="TextBox 27"/>
           <p:cNvSpPr txBox="1"/>
           <p:nvPr/>
         </p:nvSpPr>
@@ -7113,7 +7215,7 @@
       </p:sp>
       <p:sp>
         <p:nvSpPr>
-          <p:cNvPr id="28" name="Rectangle 27"/>
+          <p:cNvPr id="29" name="Rectangle 28"/>
           <p:cNvSpPr/>
           <p:nvPr/>
         </p:nvSpPr>
@@ -7158,7 +7260,7 @@
       </p:sp>
       <p:sp>
         <p:nvSpPr>
-          <p:cNvPr id="29" name="TextBox 28"/>
+          <p:cNvPr id="30" name="TextBox 29"/>
           <p:cNvSpPr txBox="1"/>
           <p:nvPr/>
         </p:nvSpPr>
@@ -7192,7 +7294,7 @@
       </p:sp>
       <p:sp>
         <p:nvSpPr>
-          <p:cNvPr id="30" name="Rectangle 29"/>
+          <p:cNvPr id="31" name="Rectangle 30"/>
           <p:cNvSpPr/>
           <p:nvPr/>
         </p:nvSpPr>
@@ -7237,7 +7339,7 @@
       </p:sp>
       <p:sp>
         <p:nvSpPr>
-          <p:cNvPr id="31" name="TextBox 30"/>
+          <p:cNvPr id="32" name="TextBox 31"/>
           <p:cNvSpPr txBox="1"/>
           <p:nvPr/>
         </p:nvSpPr>
@@ -7265,6 +7367,40 @@
                 </a:solidFill>
               </a:rPr>
               <a:t>D3 ページネーションに省略記号 (…) と最終ページ追加</a:t>
+            </a:r>
+          </a:p>
+        </p:txBody>
+      </p:sp>
+      <p:sp>
+        <p:nvSpPr>
+          <p:cNvPr id="33" name="TextBox 32"/>
+          <p:cNvSpPr txBox="1"/>
+          <p:nvPr/>
+        </p:nvSpPr>
+        <p:spPr>
+          <a:xfrm>
+            <a:off x="304800" y="8343900"/>
+            <a:ext cx="14630400" cy="190500"/>
+          </a:xfrm>
+          <a:prstGeom prst="rect">
+            <a:avLst/>
+          </a:prstGeom>
+          <a:noFill/>
+        </p:spPr>
+        <p:txBody>
+          <a:bodyPr wrap="square" lIns="0" rIns="0" tIns="0" bIns="0">
+            <a:spAutoFit/>
+          </a:bodyPr>
+          <a:lstStyle/>
+          <a:p>
+            <a:pPr algn="l"/>
+            <a:r>
+              <a:rPr sz="900" b="0">
+                <a:solidFill>
+                  <a:srgbClr val="6B7280"/>
+                </a:solidFill>
+              </a:rPr>
+              <a:t>Design Review Doc v1.2 / Internal</a:t>
             </a:r>
           </a:p>
         </p:txBody>
@@ -7321,9 +7457,43 @@
           </a:p>
         </p:txBody>
       </p:sp>
+      <p:sp>
+        <p:nvSpPr>
+          <p:cNvPr id="3" name="TextBox 2"/>
+          <p:cNvSpPr txBox="1"/>
+          <p:nvPr/>
+        </p:nvSpPr>
+        <p:spPr>
+          <a:xfrm>
+            <a:off x="304800" y="571500"/>
+            <a:ext cx="14630400" cy="228600"/>
+          </a:xfrm>
+          <a:prstGeom prst="rect">
+            <a:avLst/>
+          </a:prstGeom>
+          <a:noFill/>
+        </p:spPr>
+        <p:txBody>
+          <a:bodyPr wrap="square" lIns="0" rIns="0" tIns="0" bIns="0">
+            <a:spAutoFit/>
+          </a:bodyPr>
+          <a:lstStyle/>
+          <a:p>
+            <a:pPr algn="l"/>
+            <a:r>
+              <a:rPr sz="1100" b="0">
+                <a:solidFill>
+                  <a:srgbClr val="6B7280"/>
+                </a:solidFill>
+              </a:rPr>
+              <a:t>UI Build ui-v2.1 | Session timeout: 30 min | Updated 2026-04-10</a:t>
+            </a:r>
+          </a:p>
+        </p:txBody>
+      </p:sp>
       <p:cxnSp>
         <p:nvCxnSpPr>
-          <p:cNvPr id="3" name="Connector 2"/>
+          <p:cNvPr id="4" name="Connector 3"/>
           <p:cNvCxnSpPr/>
           <p:nvPr/>
         </p:nvCxnSpPr>
@@ -7358,7 +7528,7 @@
       </p:cxnSp>
       <p:sp>
         <p:nvSpPr>
-          <p:cNvPr id="4" name="Rectangle 3"/>
+          <p:cNvPr id="5" name="Rectangle 4"/>
           <p:cNvSpPr/>
           <p:nvPr/>
         </p:nvSpPr>
@@ -7403,7 +7573,7 @@
       </p:sp>
       <p:sp>
         <p:nvSpPr>
-          <p:cNvPr id="5" name="TextBox 4"/>
+          <p:cNvPr id="6" name="TextBox 5"/>
           <p:cNvSpPr txBox="1"/>
           <p:nvPr/>
         </p:nvSpPr>
@@ -7437,7 +7607,7 @@
       </p:sp>
       <p:sp>
         <p:nvSpPr>
-          <p:cNvPr id="6" name="Rectangle 5"/>
+          <p:cNvPr id="7" name="Rectangle 6"/>
           <p:cNvSpPr/>
           <p:nvPr/>
         </p:nvSpPr>
@@ -7482,7 +7652,7 @@
       </p:sp>
       <p:sp>
         <p:nvSpPr>
-          <p:cNvPr id="7" name="Rectangle 6"/>
+          <p:cNvPr id="8" name="Rectangle 7"/>
           <p:cNvSpPr/>
           <p:nvPr/>
         </p:nvSpPr>
@@ -7527,7 +7697,7 @@
       </p:sp>
       <p:sp>
         <p:nvSpPr>
-          <p:cNvPr id="8" name="TextBox 7"/>
+          <p:cNvPr id="9" name="TextBox 8"/>
           <p:cNvSpPr txBox="1"/>
           <p:nvPr/>
         </p:nvSpPr>
@@ -7561,7 +7731,7 @@
       </p:sp>
       <p:sp>
         <p:nvSpPr>
-          <p:cNvPr id="9" name="TextBox 8"/>
+          <p:cNvPr id="10" name="TextBox 9"/>
           <p:cNvSpPr txBox="1"/>
           <p:nvPr/>
         </p:nvSpPr>
@@ -7595,7 +7765,7 @@
       </p:sp>
       <p:cxnSp>
         <p:nvCxnSpPr>
-          <p:cNvPr id="10" name="Connector 9"/>
+          <p:cNvPr id="11" name="Connector 10"/>
           <p:cNvCxnSpPr/>
           <p:nvPr/>
         </p:nvCxnSpPr>
@@ -7630,7 +7800,7 @@
       </p:cxnSp>
       <p:sp>
         <p:nvSpPr>
-          <p:cNvPr id="11" name="Rectangle 10"/>
+          <p:cNvPr id="12" name="Rectangle 11"/>
           <p:cNvSpPr/>
           <p:nvPr/>
         </p:nvSpPr>
@@ -7675,7 +7845,7 @@
       </p:sp>
       <p:sp>
         <p:nvSpPr>
-          <p:cNvPr id="12" name="TextBox 11"/>
+          <p:cNvPr id="13" name="TextBox 12"/>
           <p:cNvSpPr txBox="1"/>
           <p:nvPr/>
         </p:nvSpPr>
@@ -7709,7 +7879,7 @@
       </p:sp>
       <p:sp>
         <p:nvSpPr>
-          <p:cNvPr id="13" name="Rectangle 12"/>
+          <p:cNvPr id="14" name="Rectangle 13"/>
           <p:cNvSpPr/>
           <p:nvPr/>
         </p:nvSpPr>
@@ -7754,7 +7924,7 @@
       </p:sp>
       <p:sp>
         <p:nvSpPr>
-          <p:cNvPr id="14" name="Rectangle 13"/>
+          <p:cNvPr id="15" name="Rectangle 14"/>
           <p:cNvSpPr/>
           <p:nvPr/>
         </p:nvSpPr>
@@ -7799,7 +7969,7 @@
       </p:sp>
       <p:sp>
         <p:nvSpPr>
-          <p:cNvPr id="15" name="TextBox 14"/>
+          <p:cNvPr id="16" name="TextBox 15"/>
           <p:cNvSpPr txBox="1"/>
           <p:nvPr/>
         </p:nvSpPr>
@@ -7833,7 +8003,7 @@
       </p:sp>
       <p:sp>
         <p:nvSpPr>
-          <p:cNvPr id="16" name="TextBox 15"/>
+          <p:cNvPr id="17" name="TextBox 16"/>
           <p:cNvSpPr txBox="1"/>
           <p:nvPr/>
         </p:nvSpPr>
@@ -7867,7 +8037,7 @@
       </p:sp>
       <p:cxnSp>
         <p:nvCxnSpPr>
-          <p:cNvPr id="17" name="Connector 16"/>
+          <p:cNvPr id="18" name="Connector 17"/>
           <p:cNvCxnSpPr/>
           <p:nvPr/>
         </p:nvCxnSpPr>
@@ -7902,7 +8072,7 @@
       </p:cxnSp>
       <p:sp>
         <p:nvSpPr>
-          <p:cNvPr id="18" name="Rectangle 17"/>
+          <p:cNvPr id="19" name="Rectangle 18"/>
           <p:cNvSpPr/>
           <p:nvPr/>
         </p:nvSpPr>
@@ -7947,7 +8117,7 @@
       </p:sp>
       <p:sp>
         <p:nvSpPr>
-          <p:cNvPr id="19" name="TextBox 18"/>
+          <p:cNvPr id="20" name="TextBox 19"/>
           <p:cNvSpPr txBox="1"/>
           <p:nvPr/>
         </p:nvSpPr>
@@ -7981,7 +8151,7 @@
       </p:sp>
       <p:sp>
         <p:nvSpPr>
-          <p:cNvPr id="20" name="Rectangle 19"/>
+          <p:cNvPr id="21" name="Rectangle 20"/>
           <p:cNvSpPr/>
           <p:nvPr/>
         </p:nvSpPr>
@@ -8026,7 +8196,7 @@
       </p:sp>
       <p:sp>
         <p:nvSpPr>
-          <p:cNvPr id="21" name="Rectangle 20"/>
+          <p:cNvPr id="22" name="Rectangle 21"/>
           <p:cNvSpPr/>
           <p:nvPr/>
         </p:nvSpPr>
@@ -8071,7 +8241,7 @@
       </p:sp>
       <p:sp>
         <p:nvSpPr>
-          <p:cNvPr id="22" name="TextBox 21"/>
+          <p:cNvPr id="23" name="TextBox 22"/>
           <p:cNvSpPr txBox="1"/>
           <p:nvPr/>
         </p:nvSpPr>
@@ -8105,7 +8275,7 @@
       </p:sp>
       <p:sp>
         <p:nvSpPr>
-          <p:cNvPr id="23" name="TextBox 22"/>
+          <p:cNvPr id="24" name="TextBox 23"/>
           <p:cNvSpPr txBox="1"/>
           <p:nvPr/>
         </p:nvSpPr>
@@ -8139,7 +8309,7 @@
       </p:sp>
       <p:cxnSp>
         <p:nvCxnSpPr>
-          <p:cNvPr id="24" name="Connector 23"/>
+          <p:cNvPr id="25" name="Connector 24"/>
           <p:cNvCxnSpPr/>
           <p:nvPr/>
         </p:nvCxnSpPr>
@@ -8174,7 +8344,7 @@
       </p:cxnSp>
       <p:sp>
         <p:nvSpPr>
-          <p:cNvPr id="25" name="Rectangle 24"/>
+          <p:cNvPr id="26" name="Rectangle 25"/>
           <p:cNvSpPr/>
           <p:nvPr/>
         </p:nvSpPr>
@@ -8219,7 +8389,7 @@
       </p:sp>
       <p:sp>
         <p:nvSpPr>
-          <p:cNvPr id="26" name="TextBox 25"/>
+          <p:cNvPr id="27" name="TextBox 26"/>
           <p:cNvSpPr txBox="1"/>
           <p:nvPr/>
         </p:nvSpPr>
@@ -8253,7 +8423,7 @@
       </p:sp>
       <p:sp>
         <p:nvSpPr>
-          <p:cNvPr id="27" name="Rectangle 26"/>
+          <p:cNvPr id="28" name="Rectangle 27"/>
           <p:cNvSpPr/>
           <p:nvPr/>
         </p:nvSpPr>
@@ -8298,7 +8468,7 @@
       </p:sp>
       <p:sp>
         <p:nvSpPr>
-          <p:cNvPr id="28" name="Rectangle 27"/>
+          <p:cNvPr id="29" name="Rectangle 28"/>
           <p:cNvSpPr/>
           <p:nvPr/>
         </p:nvSpPr>
@@ -8343,7 +8513,7 @@
       </p:sp>
       <p:sp>
         <p:nvSpPr>
-          <p:cNvPr id="29" name="TextBox 28"/>
+          <p:cNvPr id="30" name="TextBox 29"/>
           <p:cNvSpPr txBox="1"/>
           <p:nvPr/>
         </p:nvSpPr>
@@ -8377,7 +8547,7 @@
       </p:sp>
       <p:sp>
         <p:nvSpPr>
-          <p:cNvPr id="30" name="TextBox 29"/>
+          <p:cNvPr id="31" name="TextBox 30"/>
           <p:cNvSpPr txBox="1"/>
           <p:nvPr/>
         </p:nvSpPr>
@@ -8411,7 +8581,7 @@
       </p:sp>
       <p:cxnSp>
         <p:nvCxnSpPr>
-          <p:cNvPr id="31" name="Connector 30"/>
+          <p:cNvPr id="32" name="Connector 31"/>
           <p:cNvCxnSpPr/>
           <p:nvPr/>
         </p:nvCxnSpPr>
@@ -8446,7 +8616,7 @@
       </p:cxnSp>
       <p:sp>
         <p:nvSpPr>
-          <p:cNvPr id="32" name="Rectangle 31"/>
+          <p:cNvPr id="33" name="Rectangle 32"/>
           <p:cNvSpPr/>
           <p:nvPr/>
         </p:nvSpPr>
@@ -8491,7 +8661,7 @@
       </p:sp>
       <p:sp>
         <p:nvSpPr>
-          <p:cNvPr id="33" name="TextBox 32"/>
+          <p:cNvPr id="34" name="TextBox 33"/>
           <p:cNvSpPr txBox="1"/>
           <p:nvPr/>
         </p:nvSpPr>
@@ -8525,7 +8695,7 @@
       </p:sp>
       <p:sp>
         <p:nvSpPr>
-          <p:cNvPr id="34" name="Rectangle 33"/>
+          <p:cNvPr id="35" name="Rectangle 34"/>
           <p:cNvSpPr/>
           <p:nvPr/>
         </p:nvSpPr>
@@ -8570,7 +8740,7 @@
       </p:sp>
       <p:sp>
         <p:nvSpPr>
-          <p:cNvPr id="35" name="Rectangle 34"/>
+          <p:cNvPr id="36" name="Rectangle 35"/>
           <p:cNvSpPr/>
           <p:nvPr/>
         </p:nvSpPr>
@@ -8615,7 +8785,7 @@
       </p:sp>
       <p:sp>
         <p:nvSpPr>
-          <p:cNvPr id="36" name="TextBox 35"/>
+          <p:cNvPr id="37" name="TextBox 36"/>
           <p:cNvSpPr txBox="1"/>
           <p:nvPr/>
         </p:nvSpPr>
@@ -8649,7 +8819,7 @@
       </p:sp>
       <p:sp>
         <p:nvSpPr>
-          <p:cNvPr id="37" name="TextBox 36"/>
+          <p:cNvPr id="38" name="TextBox 37"/>
           <p:cNvSpPr txBox="1"/>
           <p:nvPr/>
         </p:nvSpPr>
@@ -8677,6 +8847,40 @@
                 </a:solidFill>
               </a:rPr>
               <a:t>注文番号 ORD-2026-04-13579</a:t>
+            </a:r>
+          </a:p>
+        </p:txBody>
+      </p:sp>
+      <p:sp>
+        <p:nvSpPr>
+          <p:cNvPr id="39" name="TextBox 38"/>
+          <p:cNvSpPr txBox="1"/>
+          <p:nvPr/>
+        </p:nvSpPr>
+        <p:spPr>
+          <a:xfrm>
+            <a:off x="304800" y="8343900"/>
+            <a:ext cx="14630400" cy="190500"/>
+          </a:xfrm>
+          <a:prstGeom prst="rect">
+            <a:avLst/>
+          </a:prstGeom>
+          <a:noFill/>
+        </p:spPr>
+        <p:txBody>
+          <a:bodyPr wrap="square" lIns="0" rIns="0" tIns="0" bIns="0">
+            <a:spAutoFit/>
+          </a:bodyPr>
+          <a:lstStyle/>
+          <a:p>
+            <a:pPr algn="l"/>
+            <a:r>
+              <a:rPr sz="900" b="0">
+                <a:solidFill>
+                  <a:srgbClr val="6B7280"/>
+                </a:solidFill>
+              </a:rPr>
+              <a:t>User Research Team / Page 1 of 1</a:t>
             </a:r>
           </a:p>
         </p:txBody>
@@ -8733,9 +8937,43 @@
           </a:p>
         </p:txBody>
       </p:sp>
+      <p:sp>
+        <p:nvSpPr>
+          <p:cNvPr id="3" name="TextBox 2"/>
+          <p:cNvSpPr txBox="1"/>
+          <p:nvPr/>
+        </p:nvSpPr>
+        <p:spPr>
+          <a:xfrm>
+            <a:off x="304800" y="571500"/>
+            <a:ext cx="14630400" cy="228600"/>
+          </a:xfrm>
+          <a:prstGeom prst="rect">
+            <a:avLst/>
+          </a:prstGeom>
+          <a:noFill/>
+        </p:spPr>
+        <p:txBody>
+          <a:bodyPr wrap="square" lIns="0" rIns="0" tIns="0" bIns="0">
+            <a:spAutoFit/>
+          </a:bodyPr>
+          <a:lstStyle/>
+          <a:p>
+            <a:pPr algn="l"/>
+            <a:r>
+              <a:rPr sz="1100" b="0">
+                <a:solidFill>
+                  <a:srgbClr val="6B7280"/>
+                </a:solidFill>
+              </a:rPr>
+              <a:t>Period: 2026 Q1 | Data as of 2026-03-31 23:59 JST | 次回更新: 翌営業日</a:t>
+            </a:r>
+          </a:p>
+        </p:txBody>
+      </p:sp>
       <p:cxnSp>
         <p:nvCxnSpPr>
-          <p:cNvPr id="3" name="Connector 2"/>
+          <p:cNvPr id="4" name="Connector 3"/>
           <p:cNvCxnSpPr/>
           <p:nvPr/>
         </p:nvCxnSpPr>
@@ -8770,7 +9008,7 @@
       </p:cxnSp>
       <p:sp>
         <p:nvSpPr>
-          <p:cNvPr id="4" name="Rectangle 3"/>
+          <p:cNvPr id="5" name="Rectangle 4"/>
           <p:cNvSpPr/>
           <p:nvPr/>
         </p:nvSpPr>
@@ -8815,7 +9053,7 @@
       </p:sp>
       <p:sp>
         <p:nvSpPr>
-          <p:cNvPr id="5" name="TextBox 4"/>
+          <p:cNvPr id="6" name="TextBox 5"/>
           <p:cNvSpPr txBox="1"/>
           <p:nvPr/>
         </p:nvSpPr>
@@ -8849,7 +9087,7 @@
       </p:sp>
       <p:sp>
         <p:nvSpPr>
-          <p:cNvPr id="6" name="Rectangle 5"/>
+          <p:cNvPr id="7" name="Rectangle 6"/>
           <p:cNvSpPr/>
           <p:nvPr/>
         </p:nvSpPr>
@@ -8894,7 +9132,7 @@
       </p:sp>
       <p:sp>
         <p:nvSpPr>
-          <p:cNvPr id="7" name="TextBox 6"/>
+          <p:cNvPr id="8" name="TextBox 7"/>
           <p:cNvSpPr txBox="1"/>
           <p:nvPr/>
         </p:nvSpPr>
@@ -8928,7 +9166,7 @@
       </p:sp>
       <p:sp>
         <p:nvSpPr>
-          <p:cNvPr id="8" name="TextBox 7"/>
+          <p:cNvPr id="9" name="TextBox 8"/>
           <p:cNvSpPr txBox="1"/>
           <p:nvPr/>
         </p:nvSpPr>
@@ -8962,7 +9200,7 @@
       </p:sp>
       <p:sp>
         <p:nvSpPr>
-          <p:cNvPr id="9" name="Rectangle 8"/>
+          <p:cNvPr id="10" name="Rectangle 9"/>
           <p:cNvSpPr/>
           <p:nvPr/>
         </p:nvSpPr>
@@ -9007,7 +9245,7 @@
       </p:sp>
       <p:sp>
         <p:nvSpPr>
-          <p:cNvPr id="10" name="TextBox 9"/>
+          <p:cNvPr id="11" name="TextBox 10"/>
           <p:cNvSpPr txBox="1"/>
           <p:nvPr/>
         </p:nvSpPr>
@@ -9041,7 +9279,7 @@
       </p:sp>
       <p:sp>
         <p:nvSpPr>
-          <p:cNvPr id="11" name="TextBox 10"/>
+          <p:cNvPr id="12" name="TextBox 11"/>
           <p:cNvSpPr txBox="1"/>
           <p:nvPr/>
         </p:nvSpPr>
@@ -9075,7 +9313,7 @@
       </p:sp>
       <p:sp>
         <p:nvSpPr>
-          <p:cNvPr id="12" name="Rectangle 11"/>
+          <p:cNvPr id="13" name="Rectangle 12"/>
           <p:cNvSpPr/>
           <p:nvPr/>
         </p:nvSpPr>
@@ -9120,7 +9358,7 @@
       </p:sp>
       <p:sp>
         <p:nvSpPr>
-          <p:cNvPr id="13" name="TextBox 12"/>
+          <p:cNvPr id="14" name="TextBox 13"/>
           <p:cNvSpPr txBox="1"/>
           <p:nvPr/>
         </p:nvSpPr>
@@ -9154,7 +9392,7 @@
       </p:sp>
       <p:sp>
         <p:nvSpPr>
-          <p:cNvPr id="14" name="TextBox 13"/>
+          <p:cNvPr id="15" name="TextBox 14"/>
           <p:cNvSpPr txBox="1"/>
           <p:nvPr/>
         </p:nvSpPr>
@@ -9188,7 +9426,7 @@
       </p:sp>
       <p:sp>
         <p:nvSpPr>
-          <p:cNvPr id="15" name="Rectangle 14"/>
+          <p:cNvPr id="16" name="Rectangle 15"/>
           <p:cNvSpPr/>
           <p:nvPr/>
         </p:nvSpPr>
@@ -9233,7 +9471,7 @@
       </p:sp>
       <p:sp>
         <p:nvSpPr>
-          <p:cNvPr id="16" name="TextBox 15"/>
+          <p:cNvPr id="17" name="TextBox 16"/>
           <p:cNvSpPr txBox="1"/>
           <p:nvPr/>
         </p:nvSpPr>
@@ -9267,7 +9505,7 @@
       </p:sp>
       <p:sp>
         <p:nvSpPr>
-          <p:cNvPr id="17" name="Rectangle 16"/>
+          <p:cNvPr id="18" name="Rectangle 17"/>
           <p:cNvSpPr/>
           <p:nvPr/>
         </p:nvSpPr>
@@ -9312,7 +9550,7 @@
       </p:sp>
       <p:sp>
         <p:nvSpPr>
-          <p:cNvPr id="18" name="TextBox 17"/>
+          <p:cNvPr id="19" name="TextBox 18"/>
           <p:cNvSpPr txBox="1"/>
           <p:nvPr/>
         </p:nvSpPr>
@@ -9346,7 +9584,7 @@
       </p:sp>
       <p:sp>
         <p:nvSpPr>
-          <p:cNvPr id="19" name="Rectangle 18"/>
+          <p:cNvPr id="20" name="Rectangle 19"/>
           <p:cNvSpPr/>
           <p:nvPr/>
         </p:nvSpPr>
@@ -9391,7 +9629,7 @@
       </p:sp>
       <p:sp>
         <p:nvSpPr>
-          <p:cNvPr id="20" name="TextBox 19"/>
+          <p:cNvPr id="21" name="TextBox 20"/>
           <p:cNvSpPr txBox="1"/>
           <p:nvPr/>
         </p:nvSpPr>
@@ -9425,7 +9663,7 @@
       </p:sp>
       <p:sp>
         <p:nvSpPr>
-          <p:cNvPr id="21" name="Rectangle 20"/>
+          <p:cNvPr id="22" name="Rectangle 21"/>
           <p:cNvSpPr/>
           <p:nvPr/>
         </p:nvSpPr>
@@ -9470,7 +9708,7 @@
       </p:sp>
       <p:sp>
         <p:nvSpPr>
-          <p:cNvPr id="22" name="TextBox 21"/>
+          <p:cNvPr id="23" name="TextBox 22"/>
           <p:cNvSpPr txBox="1"/>
           <p:nvPr/>
         </p:nvSpPr>
@@ -9504,7 +9742,7 @@
       </p:sp>
       <p:sp>
         <p:nvSpPr>
-          <p:cNvPr id="23" name="Rectangle 22"/>
+          <p:cNvPr id="24" name="Rectangle 23"/>
           <p:cNvSpPr/>
           <p:nvPr/>
         </p:nvSpPr>
@@ -9549,7 +9787,7 @@
       </p:sp>
       <p:sp>
         <p:nvSpPr>
-          <p:cNvPr id="24" name="TextBox 23"/>
+          <p:cNvPr id="25" name="TextBox 24"/>
           <p:cNvSpPr txBox="1"/>
           <p:nvPr/>
         </p:nvSpPr>
@@ -9583,7 +9821,7 @@
       </p:sp>
       <p:sp>
         <p:nvSpPr>
-          <p:cNvPr id="25" name="Rectangle 24"/>
+          <p:cNvPr id="26" name="Rectangle 25"/>
           <p:cNvSpPr/>
           <p:nvPr/>
         </p:nvSpPr>
@@ -9628,7 +9866,7 @@
       </p:sp>
       <p:sp>
         <p:nvSpPr>
-          <p:cNvPr id="26" name="TextBox 25"/>
+          <p:cNvPr id="27" name="TextBox 26"/>
           <p:cNvSpPr txBox="1"/>
           <p:nvPr/>
         </p:nvSpPr>
@@ -9662,7 +9900,7 @@
       </p:sp>
       <p:sp>
         <p:nvSpPr>
-          <p:cNvPr id="27" name="TextBox 26"/>
+          <p:cNvPr id="28" name="TextBox 27"/>
           <p:cNvSpPr txBox="1"/>
           <p:nvPr/>
         </p:nvSpPr>
@@ -9696,7 +9934,7 @@
       </p:sp>
       <p:sp>
         <p:nvSpPr>
-          <p:cNvPr id="28" name="TextBox 27"/>
+          <p:cNvPr id="29" name="TextBox 28"/>
           <p:cNvSpPr txBox="1"/>
           <p:nvPr/>
         </p:nvSpPr>
@@ -9730,7 +9968,7 @@
       </p:sp>
       <p:sp>
         <p:nvSpPr>
-          <p:cNvPr id="29" name="Rectangle 28"/>
+          <p:cNvPr id="30" name="Rectangle 29"/>
           <p:cNvSpPr/>
           <p:nvPr/>
         </p:nvSpPr>
@@ -9775,7 +10013,7 @@
       </p:sp>
       <p:sp>
         <p:nvSpPr>
-          <p:cNvPr id="30" name="TextBox 29"/>
+          <p:cNvPr id="31" name="TextBox 30"/>
           <p:cNvSpPr txBox="1"/>
           <p:nvPr/>
         </p:nvSpPr>
@@ -9809,7 +10047,7 @@
       </p:sp>
       <p:sp>
         <p:nvSpPr>
-          <p:cNvPr id="31" name="TextBox 30"/>
+          <p:cNvPr id="32" name="TextBox 31"/>
           <p:cNvSpPr txBox="1"/>
           <p:nvPr/>
         </p:nvSpPr>
@@ -9843,7 +10081,7 @@
       </p:sp>
       <p:sp>
         <p:nvSpPr>
-          <p:cNvPr id="32" name="TextBox 31"/>
+          <p:cNvPr id="33" name="TextBox 32"/>
           <p:cNvSpPr txBox="1"/>
           <p:nvPr/>
         </p:nvSpPr>
@@ -9877,7 +10115,7 @@
       </p:sp>
       <p:sp>
         <p:nvSpPr>
-          <p:cNvPr id="33" name="Rectangle 32"/>
+          <p:cNvPr id="34" name="Rectangle 33"/>
           <p:cNvSpPr/>
           <p:nvPr/>
         </p:nvSpPr>
@@ -9922,7 +10160,7 @@
       </p:sp>
       <p:sp>
         <p:nvSpPr>
-          <p:cNvPr id="34" name="TextBox 33"/>
+          <p:cNvPr id="35" name="TextBox 34"/>
           <p:cNvSpPr txBox="1"/>
           <p:nvPr/>
         </p:nvSpPr>
@@ -9956,7 +10194,7 @@
       </p:sp>
       <p:sp>
         <p:nvSpPr>
-          <p:cNvPr id="35" name="TextBox 34"/>
+          <p:cNvPr id="36" name="TextBox 35"/>
           <p:cNvSpPr txBox="1"/>
           <p:nvPr/>
         </p:nvSpPr>
@@ -9990,7 +10228,7 @@
       </p:sp>
       <p:sp>
         <p:nvSpPr>
-          <p:cNvPr id="36" name="TextBox 35"/>
+          <p:cNvPr id="37" name="TextBox 36"/>
           <p:cNvSpPr txBox="1"/>
           <p:nvPr/>
         </p:nvSpPr>
@@ -10024,7 +10262,7 @@
       </p:sp>
       <p:sp>
         <p:nvSpPr>
-          <p:cNvPr id="37" name="Rectangle 36"/>
+          <p:cNvPr id="38" name="Rectangle 37"/>
           <p:cNvSpPr/>
           <p:nvPr/>
         </p:nvSpPr>
@@ -10069,7 +10307,7 @@
       </p:sp>
       <p:sp>
         <p:nvSpPr>
-          <p:cNvPr id="38" name="TextBox 37"/>
+          <p:cNvPr id="39" name="TextBox 38"/>
           <p:cNvSpPr txBox="1"/>
           <p:nvPr/>
         </p:nvSpPr>
@@ -10103,7 +10341,7 @@
       </p:sp>
       <p:sp>
         <p:nvSpPr>
-          <p:cNvPr id="39" name="Rectangle 38"/>
+          <p:cNvPr id="40" name="Rectangle 39"/>
           <p:cNvSpPr/>
           <p:nvPr/>
         </p:nvSpPr>
@@ -10148,7 +10386,7 @@
       </p:sp>
       <p:sp>
         <p:nvSpPr>
-          <p:cNvPr id="40" name="TextBox 39"/>
+          <p:cNvPr id="41" name="TextBox 40"/>
           <p:cNvSpPr txBox="1"/>
           <p:nvPr/>
         </p:nvSpPr>
@@ -10182,7 +10420,7 @@
       </p:sp>
       <p:sp>
         <p:nvSpPr>
-          <p:cNvPr id="41" name="Rectangle 40"/>
+          <p:cNvPr id="42" name="Rectangle 41"/>
           <p:cNvSpPr/>
           <p:nvPr/>
         </p:nvSpPr>
@@ -10227,7 +10465,7 @@
       </p:sp>
       <p:sp>
         <p:nvSpPr>
-          <p:cNvPr id="42" name="TextBox 41"/>
+          <p:cNvPr id="43" name="TextBox 42"/>
           <p:cNvSpPr txBox="1"/>
           <p:nvPr/>
         </p:nvSpPr>
@@ -10255,6 +10493,40 @@
                 </a:solidFill>
               </a:rPr>
               <a:t>A3 解約率改善はサポート体制強化の効果</a:t>
+            </a:r>
+          </a:p>
+        </p:txBody>
+      </p:sp>
+      <p:sp>
+        <p:nvSpPr>
+          <p:cNvPr id="44" name="TextBox 43"/>
+          <p:cNvSpPr txBox="1"/>
+          <p:nvPr/>
+        </p:nvSpPr>
+        <p:spPr>
+          <a:xfrm>
+            <a:off x="304800" y="8343900"/>
+            <a:ext cx="14630400" cy="190500"/>
+          </a:xfrm>
+          <a:prstGeom prst="rect">
+            <a:avLst/>
+          </a:prstGeom>
+          <a:noFill/>
+        </p:spPr>
+        <p:txBody>
+          <a:bodyPr wrap="square" lIns="0" rIns="0" tIns="0" bIns="0">
+            <a:spAutoFit/>
+          </a:bodyPr>
+          <a:lstStyle/>
+          <a:p>
+            <a:pPr algn="l"/>
+            <a:r>
+              <a:rPr sz="900" b="0">
+                <a:solidFill>
+                  <a:srgbClr val="6B7280"/>
+                </a:solidFill>
+              </a:rPr>
+              <a:t>Finance Team / Monthly Report / 2026-04 Issue</a:t>
             </a:r>
           </a:p>
         </p:txBody>
@@ -10311,9 +10583,43 @@
           </a:p>
         </p:txBody>
       </p:sp>
+      <p:sp>
+        <p:nvSpPr>
+          <p:cNvPr id="3" name="TextBox 2"/>
+          <p:cNvSpPr txBox="1"/>
+          <p:nvPr/>
+        </p:nvSpPr>
+        <p:spPr>
+          <a:xfrm>
+            <a:off x="304800" y="571500"/>
+            <a:ext cx="14630400" cy="228600"/>
+          </a:xfrm>
+          <a:prstGeom prst="rect">
+            <a:avLst/>
+          </a:prstGeom>
+          <a:noFill/>
+        </p:spPr>
+        <p:txBody>
+          <a:bodyPr wrap="square" lIns="0" rIns="0" tIns="0" bIns="0">
+            <a:spAutoFit/>
+          </a:bodyPr>
+          <a:lstStyle/>
+          <a:p>
+            <a:pPr algn="l"/>
+            <a:r>
+              <a:rPr sz="1100" b="0">
+                <a:solidFill>
+                  <a:srgbClr val="6B7280"/>
+                </a:solidFill>
+              </a:rPr>
+              <a:t>env: production-apac | Owner: Platform Team | Last audit: 2026-03-15</a:t>
+            </a:r>
+          </a:p>
+        </p:txBody>
+      </p:sp>
       <p:cxnSp>
         <p:nvCxnSpPr>
-          <p:cNvPr id="3" name="Connector 2"/>
+          <p:cNvPr id="4" name="Connector 3"/>
           <p:cNvCxnSpPr/>
           <p:nvPr/>
         </p:nvCxnSpPr>
@@ -10348,7 +10654,7 @@
       </p:cxnSp>
       <p:sp>
         <p:nvSpPr>
-          <p:cNvPr id="4" name="Rectangle 3"/>
+          <p:cNvPr id="5" name="Rectangle 4"/>
           <p:cNvSpPr/>
           <p:nvPr/>
         </p:nvSpPr>
@@ -10393,7 +10699,7 @@
       </p:sp>
       <p:sp>
         <p:nvSpPr>
-          <p:cNvPr id="5" name="TextBox 4"/>
+          <p:cNvPr id="6" name="TextBox 5"/>
           <p:cNvSpPr txBox="1"/>
           <p:nvPr/>
         </p:nvSpPr>
@@ -10427,7 +10733,7 @@
       </p:sp>
       <p:sp>
         <p:nvSpPr>
-          <p:cNvPr id="6" name="Rectangle 5"/>
+          <p:cNvPr id="7" name="Rectangle 6"/>
           <p:cNvSpPr/>
           <p:nvPr/>
         </p:nvSpPr>
@@ -10472,7 +10778,7 @@
       </p:sp>
       <p:sp>
         <p:nvSpPr>
-          <p:cNvPr id="7" name="TextBox 6"/>
+          <p:cNvPr id="8" name="TextBox 7"/>
           <p:cNvSpPr txBox="1"/>
           <p:nvPr/>
         </p:nvSpPr>
@@ -10506,7 +10812,7 @@
       </p:sp>
       <p:sp>
         <p:nvSpPr>
-          <p:cNvPr id="8" name="Rectangle 7"/>
+          <p:cNvPr id="9" name="Rectangle 8"/>
           <p:cNvSpPr/>
           <p:nvPr/>
         </p:nvSpPr>
@@ -10551,7 +10857,7 @@
       </p:sp>
       <p:sp>
         <p:nvSpPr>
-          <p:cNvPr id="9" name="TextBox 8"/>
+          <p:cNvPr id="10" name="TextBox 9"/>
           <p:cNvSpPr txBox="1"/>
           <p:nvPr/>
         </p:nvSpPr>
@@ -10585,7 +10891,7 @@
       </p:sp>
       <p:sp>
         <p:nvSpPr>
-          <p:cNvPr id="10" name="Rectangle 9"/>
+          <p:cNvPr id="11" name="Rectangle 10"/>
           <p:cNvSpPr/>
           <p:nvPr/>
         </p:nvSpPr>
@@ -10630,7 +10936,7 @@
       </p:sp>
       <p:sp>
         <p:nvSpPr>
-          <p:cNvPr id="11" name="TextBox 10"/>
+          <p:cNvPr id="12" name="TextBox 11"/>
           <p:cNvSpPr txBox="1"/>
           <p:nvPr/>
         </p:nvSpPr>
@@ -10664,7 +10970,7 @@
       </p:sp>
       <p:sp>
         <p:nvSpPr>
-          <p:cNvPr id="12" name="Rectangle 11"/>
+          <p:cNvPr id="13" name="Rectangle 12"/>
           <p:cNvSpPr/>
           <p:nvPr/>
         </p:nvSpPr>
@@ -10709,7 +11015,7 @@
       </p:sp>
       <p:sp>
         <p:nvSpPr>
-          <p:cNvPr id="13" name="TextBox 12"/>
+          <p:cNvPr id="14" name="TextBox 13"/>
           <p:cNvSpPr txBox="1"/>
           <p:nvPr/>
         </p:nvSpPr>
@@ -10743,7 +11049,7 @@
       </p:sp>
       <p:cxnSp>
         <p:nvCxnSpPr>
-          <p:cNvPr id="14" name="Connector 13"/>
+          <p:cNvPr id="15" name="Connector 14"/>
           <p:cNvCxnSpPr/>
           <p:nvPr/>
         </p:nvCxnSpPr>
@@ -10778,7 +11084,7 @@
       </p:cxnSp>
       <p:sp>
         <p:nvSpPr>
-          <p:cNvPr id="15" name="Rectangle 14"/>
+          <p:cNvPr id="16" name="Rectangle 15"/>
           <p:cNvSpPr/>
           <p:nvPr/>
         </p:nvSpPr>
@@ -10823,7 +11129,7 @@
       </p:sp>
       <p:sp>
         <p:nvSpPr>
-          <p:cNvPr id="16" name="Rectangle 15"/>
+          <p:cNvPr id="17" name="Rectangle 16"/>
           <p:cNvSpPr/>
           <p:nvPr/>
         </p:nvSpPr>
@@ -10868,7 +11174,7 @@
       </p:sp>
       <p:sp>
         <p:nvSpPr>
-          <p:cNvPr id="17" name="TextBox 16"/>
+          <p:cNvPr id="18" name="TextBox 17"/>
           <p:cNvSpPr txBox="1"/>
           <p:nvPr/>
         </p:nvSpPr>
@@ -10902,7 +11208,7 @@
       </p:sp>
       <p:sp>
         <p:nvSpPr>
-          <p:cNvPr id="18" name="Rectangle 17"/>
+          <p:cNvPr id="19" name="Rectangle 18"/>
           <p:cNvSpPr/>
           <p:nvPr/>
         </p:nvSpPr>
@@ -10947,7 +11253,7 @@
       </p:sp>
       <p:sp>
         <p:nvSpPr>
-          <p:cNvPr id="19" name="TextBox 18"/>
+          <p:cNvPr id="20" name="TextBox 19"/>
           <p:cNvSpPr txBox="1"/>
           <p:nvPr/>
         </p:nvSpPr>
@@ -10981,7 +11287,7 @@
       </p:sp>
       <p:sp>
         <p:nvSpPr>
-          <p:cNvPr id="20" name="Rectangle 19"/>
+          <p:cNvPr id="21" name="Rectangle 20"/>
           <p:cNvSpPr/>
           <p:nvPr/>
         </p:nvSpPr>
@@ -11026,7 +11332,7 @@
       </p:sp>
       <p:sp>
         <p:nvSpPr>
-          <p:cNvPr id="21" name="TextBox 20"/>
+          <p:cNvPr id="22" name="TextBox 21"/>
           <p:cNvSpPr txBox="1"/>
           <p:nvPr/>
         </p:nvSpPr>
@@ -11060,7 +11366,7 @@
       </p:sp>
       <p:sp>
         <p:nvSpPr>
-          <p:cNvPr id="22" name="Rectangle 21"/>
+          <p:cNvPr id="23" name="Rectangle 22"/>
           <p:cNvSpPr/>
           <p:nvPr/>
         </p:nvSpPr>
@@ -11105,7 +11411,7 @@
       </p:sp>
       <p:sp>
         <p:nvSpPr>
-          <p:cNvPr id="23" name="TextBox 22"/>
+          <p:cNvPr id="24" name="TextBox 23"/>
           <p:cNvSpPr txBox="1"/>
           <p:nvPr/>
         </p:nvSpPr>
@@ -11139,7 +11445,7 @@
       </p:sp>
       <p:sp>
         <p:nvSpPr>
-          <p:cNvPr id="24" name="Rectangle 23"/>
+          <p:cNvPr id="25" name="Rectangle 24"/>
           <p:cNvSpPr/>
           <p:nvPr/>
         </p:nvSpPr>
@@ -11184,7 +11490,7 @@
       </p:sp>
       <p:sp>
         <p:nvSpPr>
-          <p:cNvPr id="25" name="TextBox 24"/>
+          <p:cNvPr id="26" name="TextBox 25"/>
           <p:cNvSpPr txBox="1"/>
           <p:nvPr/>
         </p:nvSpPr>
@@ -11218,7 +11524,7 @@
       </p:sp>
       <p:sp>
         <p:nvSpPr>
-          <p:cNvPr id="26" name="Rectangle 25"/>
+          <p:cNvPr id="27" name="Rectangle 26"/>
           <p:cNvSpPr/>
           <p:nvPr/>
         </p:nvSpPr>
@@ -11263,7 +11569,7 @@
       </p:sp>
       <p:sp>
         <p:nvSpPr>
-          <p:cNvPr id="27" name="Rectangle 26"/>
+          <p:cNvPr id="28" name="Rectangle 27"/>
           <p:cNvSpPr/>
           <p:nvPr/>
         </p:nvSpPr>
@@ -11308,7 +11614,7 @@
       </p:sp>
       <p:sp>
         <p:nvSpPr>
-          <p:cNvPr id="28" name="TextBox 27"/>
+          <p:cNvPr id="29" name="TextBox 28"/>
           <p:cNvSpPr txBox="1"/>
           <p:nvPr/>
         </p:nvSpPr>
@@ -11342,7 +11648,7 @@
       </p:sp>
       <p:sp>
         <p:nvSpPr>
-          <p:cNvPr id="29" name="Rectangle 28"/>
+          <p:cNvPr id="30" name="Rectangle 29"/>
           <p:cNvSpPr/>
           <p:nvPr/>
         </p:nvSpPr>
@@ -11387,7 +11693,7 @@
       </p:sp>
       <p:sp>
         <p:nvSpPr>
-          <p:cNvPr id="30" name="TextBox 29"/>
+          <p:cNvPr id="31" name="TextBox 30"/>
           <p:cNvSpPr txBox="1"/>
           <p:nvPr/>
         </p:nvSpPr>
@@ -11421,7 +11727,7 @@
       </p:sp>
       <p:sp>
         <p:nvSpPr>
-          <p:cNvPr id="31" name="Rectangle 30"/>
+          <p:cNvPr id="32" name="Rectangle 31"/>
           <p:cNvSpPr/>
           <p:nvPr/>
         </p:nvSpPr>
@@ -11466,7 +11772,7 @@
       </p:sp>
       <p:sp>
         <p:nvSpPr>
-          <p:cNvPr id="32" name="TextBox 31"/>
+          <p:cNvPr id="33" name="TextBox 32"/>
           <p:cNvSpPr txBox="1"/>
           <p:nvPr/>
         </p:nvSpPr>
@@ -11500,7 +11806,7 @@
       </p:sp>
       <p:sp>
         <p:nvSpPr>
-          <p:cNvPr id="33" name="Rectangle 32"/>
+          <p:cNvPr id="34" name="Rectangle 33"/>
           <p:cNvSpPr/>
           <p:nvPr/>
         </p:nvSpPr>
@@ -11545,7 +11851,7 @@
       </p:sp>
       <p:sp>
         <p:nvSpPr>
-          <p:cNvPr id="34" name="TextBox 33"/>
+          <p:cNvPr id="35" name="TextBox 34"/>
           <p:cNvSpPr txBox="1"/>
           <p:nvPr/>
         </p:nvSpPr>
@@ -11579,7 +11885,7 @@
       </p:sp>
       <p:sp>
         <p:nvSpPr>
-          <p:cNvPr id="35" name="Rectangle 34"/>
+          <p:cNvPr id="36" name="Rectangle 35"/>
           <p:cNvSpPr/>
           <p:nvPr/>
         </p:nvSpPr>
@@ -11624,7 +11930,7 @@
       </p:sp>
       <p:sp>
         <p:nvSpPr>
-          <p:cNvPr id="36" name="TextBox 35"/>
+          <p:cNvPr id="37" name="TextBox 36"/>
           <p:cNvSpPr txBox="1"/>
           <p:nvPr/>
         </p:nvSpPr>
@@ -11658,7 +11964,7 @@
       </p:sp>
       <p:sp>
         <p:nvSpPr>
-          <p:cNvPr id="37" name="Rectangle 36"/>
+          <p:cNvPr id="38" name="Rectangle 37"/>
           <p:cNvSpPr/>
           <p:nvPr/>
         </p:nvSpPr>
@@ -11703,7 +12009,7 @@
       </p:sp>
       <p:sp>
         <p:nvSpPr>
-          <p:cNvPr id="38" name="TextBox 37"/>
+          <p:cNvPr id="39" name="TextBox 38"/>
           <p:cNvSpPr txBox="1"/>
           <p:nvPr/>
         </p:nvSpPr>
@@ -11737,7 +12043,7 @@
       </p:sp>
       <p:sp>
         <p:nvSpPr>
-          <p:cNvPr id="39" name="Rectangle 38"/>
+          <p:cNvPr id="40" name="Rectangle 39"/>
           <p:cNvSpPr/>
           <p:nvPr/>
         </p:nvSpPr>
@@ -11782,7 +12088,7 @@
       </p:sp>
       <p:sp>
         <p:nvSpPr>
-          <p:cNvPr id="40" name="TextBox 39"/>
+          <p:cNvPr id="41" name="TextBox 40"/>
           <p:cNvSpPr txBox="1"/>
           <p:nvPr/>
         </p:nvSpPr>
@@ -11816,7 +12122,7 @@
       </p:sp>
       <p:sp>
         <p:nvSpPr>
-          <p:cNvPr id="41" name="Rectangle 40"/>
+          <p:cNvPr id="42" name="Rectangle 41"/>
           <p:cNvSpPr/>
           <p:nvPr/>
         </p:nvSpPr>
@@ -11861,7 +12167,7 @@
       </p:sp>
       <p:sp>
         <p:nvSpPr>
-          <p:cNvPr id="42" name="TextBox 41"/>
+          <p:cNvPr id="43" name="TextBox 42"/>
           <p:cNvSpPr txBox="1"/>
           <p:nvPr/>
         </p:nvSpPr>
@@ -11895,7 +12201,7 @@
       </p:sp>
       <p:sp>
         <p:nvSpPr>
-          <p:cNvPr id="43" name="Rectangle 42"/>
+          <p:cNvPr id="44" name="Rectangle 43"/>
           <p:cNvSpPr/>
           <p:nvPr/>
         </p:nvSpPr>
@@ -11940,7 +12246,7 @@
       </p:sp>
       <p:sp>
         <p:nvSpPr>
-          <p:cNvPr id="44" name="TextBox 43"/>
+          <p:cNvPr id="45" name="TextBox 44"/>
           <p:cNvSpPr txBox="1"/>
           <p:nvPr/>
         </p:nvSpPr>
@@ -11974,7 +12280,7 @@
       </p:sp>
       <p:sp>
         <p:nvSpPr>
-          <p:cNvPr id="45" name="Rectangle 44"/>
+          <p:cNvPr id="46" name="Rectangle 45"/>
           <p:cNvSpPr/>
           <p:nvPr/>
         </p:nvSpPr>
@@ -12019,7 +12325,7 @@
       </p:sp>
       <p:sp>
         <p:nvSpPr>
-          <p:cNvPr id="46" name="TextBox 45"/>
+          <p:cNvPr id="47" name="TextBox 46"/>
           <p:cNvSpPr txBox="1"/>
           <p:nvPr/>
         </p:nvSpPr>
@@ -12053,7 +12359,7 @@
       </p:sp>
       <p:sp>
         <p:nvSpPr>
-          <p:cNvPr id="47" name="Rectangle 46"/>
+          <p:cNvPr id="48" name="Rectangle 47"/>
           <p:cNvSpPr/>
           <p:nvPr/>
         </p:nvSpPr>
@@ -12098,7 +12404,7 @@
       </p:sp>
       <p:sp>
         <p:nvSpPr>
-          <p:cNvPr id="48" name="TextBox 47"/>
+          <p:cNvPr id="49" name="TextBox 48"/>
           <p:cNvSpPr txBox="1"/>
           <p:nvPr/>
         </p:nvSpPr>
@@ -12132,7 +12438,7 @@
       </p:sp>
       <p:sp>
         <p:nvSpPr>
-          <p:cNvPr id="49" name="Rectangle 48"/>
+          <p:cNvPr id="50" name="Rectangle 49"/>
           <p:cNvSpPr/>
           <p:nvPr/>
         </p:nvSpPr>
@@ -12177,7 +12483,7 @@
       </p:sp>
       <p:sp>
         <p:nvSpPr>
-          <p:cNvPr id="50" name="TextBox 49"/>
+          <p:cNvPr id="51" name="TextBox 50"/>
           <p:cNvSpPr txBox="1"/>
           <p:nvPr/>
         </p:nvSpPr>
@@ -12211,7 +12517,7 @@
       </p:sp>
       <p:sp>
         <p:nvSpPr>
-          <p:cNvPr id="51" name="Rectangle 50"/>
+          <p:cNvPr id="52" name="Rectangle 51"/>
           <p:cNvSpPr/>
           <p:nvPr/>
         </p:nvSpPr>
@@ -12256,7 +12562,7 @@
       </p:sp>
       <p:sp>
         <p:nvSpPr>
-          <p:cNvPr id="52" name="TextBox 51"/>
+          <p:cNvPr id="53" name="TextBox 52"/>
           <p:cNvSpPr txBox="1"/>
           <p:nvPr/>
         </p:nvSpPr>
@@ -12290,7 +12596,7 @@
       </p:sp>
       <p:sp>
         <p:nvSpPr>
-          <p:cNvPr id="53" name="Rectangle 52"/>
+          <p:cNvPr id="54" name="Rectangle 53"/>
           <p:cNvSpPr/>
           <p:nvPr/>
         </p:nvSpPr>
@@ -12335,7 +12641,7 @@
       </p:sp>
       <p:sp>
         <p:nvSpPr>
-          <p:cNvPr id="54" name="TextBox 53"/>
+          <p:cNvPr id="55" name="TextBox 54"/>
           <p:cNvSpPr txBox="1"/>
           <p:nvPr/>
         </p:nvSpPr>
@@ -12369,7 +12675,7 @@
       </p:sp>
       <p:sp>
         <p:nvSpPr>
-          <p:cNvPr id="55" name="Rectangle 54"/>
+          <p:cNvPr id="56" name="Rectangle 55"/>
           <p:cNvSpPr/>
           <p:nvPr/>
         </p:nvSpPr>
@@ -12414,7 +12720,7 @@
       </p:sp>
       <p:sp>
         <p:nvSpPr>
-          <p:cNvPr id="56" name="TextBox 55"/>
+          <p:cNvPr id="57" name="TextBox 56"/>
           <p:cNvSpPr txBox="1"/>
           <p:nvPr/>
         </p:nvSpPr>
@@ -12448,7 +12754,7 @@
       </p:sp>
       <p:sp>
         <p:nvSpPr>
-          <p:cNvPr id="57" name="Rectangle 56"/>
+          <p:cNvPr id="58" name="Rectangle 57"/>
           <p:cNvSpPr/>
           <p:nvPr/>
         </p:nvSpPr>
@@ -12493,7 +12799,7 @@
       </p:sp>
       <p:sp>
         <p:nvSpPr>
-          <p:cNvPr id="58" name="TextBox 57"/>
+          <p:cNvPr id="59" name="TextBox 58"/>
           <p:cNvSpPr txBox="1"/>
           <p:nvPr/>
         </p:nvSpPr>
@@ -12521,6 +12827,40 @@
                 </a:solidFill>
               </a:rPr>
               <a:t>180d</a:t>
+            </a:r>
+          </a:p>
+        </p:txBody>
+      </p:sp>
+      <p:sp>
+        <p:nvSpPr>
+          <p:cNvPr id="60" name="TextBox 59"/>
+          <p:cNvSpPr txBox="1"/>
+          <p:nvPr/>
+        </p:nvSpPr>
+        <p:spPr>
+          <a:xfrm>
+            <a:off x="304800" y="8343900"/>
+            <a:ext cx="14630400" cy="190500"/>
+          </a:xfrm>
+          <a:prstGeom prst="rect">
+            <a:avLst/>
+          </a:prstGeom>
+          <a:noFill/>
+        </p:spPr>
+        <p:txBody>
+          <a:bodyPr wrap="square" lIns="0" rIns="0" tIns="0" bIns="0">
+            <a:spAutoFit/>
+          </a:bodyPr>
+          <a:lstStyle/>
+          <a:p>
+            <a:pPr algn="l"/>
+            <a:r>
+              <a:rPr sz="900" b="0">
+                <a:solidFill>
+                  <a:srgbClr val="6B7280"/>
+                </a:solidFill>
+              </a:rPr>
+              <a:t>Platform Docs / Last modified: 2026-04-15</a:t>
             </a:r>
           </a:p>
         </p:txBody>
@@ -12577,9 +12917,43 @@
           </a:p>
         </p:txBody>
       </p:sp>
+      <p:sp>
+        <p:nvSpPr>
+          <p:cNvPr id="3" name="TextBox 2"/>
+          <p:cNvSpPr txBox="1"/>
+          <p:nvPr/>
+        </p:nvSpPr>
+        <p:spPr>
+          <a:xfrm>
+            <a:off x="304800" y="571500"/>
+            <a:ext cx="14630400" cy="228600"/>
+          </a:xfrm>
+          <a:prstGeom prst="rect">
+            <a:avLst/>
+          </a:prstGeom>
+          <a:noFill/>
+        </p:spPr>
+        <p:txBody>
+          <a:bodyPr wrap="square" lIns="0" rIns="0" tIns="0" bIns="0">
+            <a:spAutoFit/>
+          </a:bodyPr>
+          <a:lstStyle/>
+          <a:p>
+            <a:pPr algn="l"/>
+            <a:r>
+              <a:rPr sz="1100" b="0">
+                <a:solidFill>
+                  <a:srgbClr val="6B7280"/>
+                </a:solidFill>
+              </a:rPr>
+              <a:t>PR #2847 | Figma: 1920x1080 | Weekly Design Review 2026-04-10 15:00</a:t>
+            </a:r>
+          </a:p>
+        </p:txBody>
+      </p:sp>
       <p:cxnSp>
         <p:nvCxnSpPr>
-          <p:cNvPr id="3" name="Connector 2"/>
+          <p:cNvPr id="4" name="Connector 3"/>
           <p:cNvCxnSpPr/>
           <p:nvPr/>
         </p:nvCxnSpPr>
@@ -12614,7 +12988,7 @@
       </p:cxnSp>
       <p:sp>
         <p:nvSpPr>
-          <p:cNvPr id="4" name="Rectangle 3"/>
+          <p:cNvPr id="5" name="Rectangle 4"/>
           <p:cNvSpPr/>
           <p:nvPr/>
         </p:nvSpPr>
@@ -12659,7 +13033,7 @@
       </p:sp>
       <p:sp>
         <p:nvSpPr>
-          <p:cNvPr id="5" name="Rectangle 4"/>
+          <p:cNvPr id="6" name="Rectangle 5"/>
           <p:cNvSpPr/>
           <p:nvPr/>
         </p:nvSpPr>
@@ -12704,7 +13078,7 @@
       </p:sp>
       <p:sp>
         <p:nvSpPr>
-          <p:cNvPr id="6" name="TextBox 5"/>
+          <p:cNvPr id="7" name="TextBox 6"/>
           <p:cNvSpPr txBox="1"/>
           <p:nvPr/>
         </p:nvSpPr>
@@ -12738,7 +13112,7 @@
       </p:sp>
       <p:sp>
         <p:nvSpPr>
-          <p:cNvPr id="7" name="Rectangle 6"/>
+          <p:cNvPr id="8" name="Rectangle 7"/>
           <p:cNvSpPr/>
           <p:nvPr/>
         </p:nvSpPr>
@@ -12783,7 +13157,7 @@
       </p:sp>
       <p:sp>
         <p:nvSpPr>
-          <p:cNvPr id="8" name="TextBox 7"/>
+          <p:cNvPr id="9" name="TextBox 8"/>
           <p:cNvSpPr txBox="1"/>
           <p:nvPr/>
         </p:nvSpPr>
@@ -12817,7 +13191,7 @@
       </p:sp>
       <p:sp>
         <p:nvSpPr>
-          <p:cNvPr id="9" name="Rectangle 8"/>
+          <p:cNvPr id="10" name="Rectangle 9"/>
           <p:cNvSpPr/>
           <p:nvPr/>
         </p:nvSpPr>
@@ -12862,7 +13236,7 @@
       </p:sp>
       <p:sp>
         <p:nvSpPr>
-          <p:cNvPr id="10" name="TextBox 9"/>
+          <p:cNvPr id="11" name="TextBox 10"/>
           <p:cNvSpPr txBox="1"/>
           <p:nvPr/>
         </p:nvSpPr>
@@ -12896,7 +13270,7 @@
       </p:sp>
       <p:sp>
         <p:nvSpPr>
-          <p:cNvPr id="11" name="Rectangle 10"/>
+          <p:cNvPr id="12" name="Rectangle 11"/>
           <p:cNvSpPr/>
           <p:nvPr/>
         </p:nvSpPr>
@@ -12941,7 +13315,7 @@
       </p:sp>
       <p:sp>
         <p:nvSpPr>
-          <p:cNvPr id="12" name="TextBox 11"/>
+          <p:cNvPr id="13" name="TextBox 12"/>
           <p:cNvSpPr txBox="1"/>
           <p:nvPr/>
         </p:nvSpPr>
@@ -12975,7 +13349,7 @@
       </p:sp>
       <p:sp>
         <p:nvSpPr>
-          <p:cNvPr id="13" name="Rectangle 12"/>
+          <p:cNvPr id="14" name="Rectangle 13"/>
           <p:cNvSpPr/>
           <p:nvPr/>
         </p:nvSpPr>
@@ -13020,7 +13394,7 @@
       </p:sp>
       <p:sp>
         <p:nvSpPr>
-          <p:cNvPr id="14" name="TextBox 13"/>
+          <p:cNvPr id="15" name="TextBox 14"/>
           <p:cNvSpPr txBox="1"/>
           <p:nvPr/>
         </p:nvSpPr>
@@ -13054,7 +13428,7 @@
       </p:sp>
       <p:sp>
         <p:nvSpPr>
-          <p:cNvPr id="15" name="Rectangle 14"/>
+          <p:cNvPr id="16" name="Rectangle 15"/>
           <p:cNvSpPr/>
           <p:nvPr/>
         </p:nvSpPr>
@@ -13099,7 +13473,7 @@
       </p:sp>
       <p:sp>
         <p:nvSpPr>
-          <p:cNvPr id="16" name="TextBox 15"/>
+          <p:cNvPr id="17" name="TextBox 16"/>
           <p:cNvSpPr txBox="1"/>
           <p:nvPr/>
         </p:nvSpPr>
@@ -13133,7 +13507,7 @@
       </p:sp>
       <p:sp>
         <p:nvSpPr>
-          <p:cNvPr id="17" name="Rectangle 16"/>
+          <p:cNvPr id="18" name="Rectangle 17"/>
           <p:cNvSpPr/>
           <p:nvPr/>
         </p:nvSpPr>
@@ -13178,7 +13552,7 @@
       </p:sp>
       <p:sp>
         <p:nvSpPr>
-          <p:cNvPr id="18" name="TextBox 17"/>
+          <p:cNvPr id="19" name="TextBox 18"/>
           <p:cNvSpPr txBox="1"/>
           <p:nvPr/>
         </p:nvSpPr>
@@ -13212,7 +13586,7 @@
       </p:sp>
       <p:sp>
         <p:nvSpPr>
-          <p:cNvPr id="19" name="Rectangle 18"/>
+          <p:cNvPr id="20" name="Rectangle 19"/>
           <p:cNvSpPr/>
           <p:nvPr/>
         </p:nvSpPr>
@@ -13257,7 +13631,7 @@
       </p:sp>
       <p:sp>
         <p:nvSpPr>
-          <p:cNvPr id="20" name="TextBox 19"/>
+          <p:cNvPr id="21" name="TextBox 20"/>
           <p:cNvSpPr txBox="1"/>
           <p:nvPr/>
         </p:nvSpPr>
@@ -13291,7 +13665,7 @@
       </p:sp>
       <p:sp>
         <p:nvSpPr>
-          <p:cNvPr id="21" name="TextBox 20"/>
+          <p:cNvPr id="22" name="TextBox 21"/>
           <p:cNvSpPr txBox="1"/>
           <p:nvPr/>
         </p:nvSpPr>
@@ -13325,7 +13699,7 @@
       </p:sp>
       <p:sp>
         <p:nvSpPr>
-          <p:cNvPr id="22" name="Rectangle 21"/>
+          <p:cNvPr id="23" name="Rectangle 22"/>
           <p:cNvSpPr/>
           <p:nvPr/>
         </p:nvSpPr>
@@ -13370,7 +13744,7 @@
       </p:sp>
       <p:sp>
         <p:nvSpPr>
-          <p:cNvPr id="23" name="TextBox 22"/>
+          <p:cNvPr id="24" name="TextBox 23"/>
           <p:cNvSpPr txBox="1"/>
           <p:nvPr/>
         </p:nvSpPr>
@@ -13404,7 +13778,7 @@
       </p:sp>
       <p:sp>
         <p:nvSpPr>
-          <p:cNvPr id="24" name="TextBox 23"/>
+          <p:cNvPr id="25" name="TextBox 24"/>
           <p:cNvSpPr txBox="1"/>
           <p:nvPr/>
         </p:nvSpPr>
@@ -13438,7 +13812,7 @@
       </p:sp>
       <p:sp>
         <p:nvSpPr>
-          <p:cNvPr id="25" name="Rectangle 24"/>
+          <p:cNvPr id="26" name="Rectangle 25"/>
           <p:cNvSpPr/>
           <p:nvPr/>
         </p:nvSpPr>
@@ -13483,7 +13857,7 @@
       </p:sp>
       <p:sp>
         <p:nvSpPr>
-          <p:cNvPr id="26" name="TextBox 25"/>
+          <p:cNvPr id="27" name="TextBox 26"/>
           <p:cNvSpPr txBox="1"/>
           <p:nvPr/>
         </p:nvSpPr>
@@ -13517,7 +13891,7 @@
       </p:sp>
       <p:sp>
         <p:nvSpPr>
-          <p:cNvPr id="27" name="TextBox 26"/>
+          <p:cNvPr id="28" name="TextBox 27"/>
           <p:cNvSpPr txBox="1"/>
           <p:nvPr/>
         </p:nvSpPr>
@@ -13551,7 +13925,7 @@
       </p:sp>
       <p:sp>
         <p:nvSpPr>
-          <p:cNvPr id="28" name="Rectangle 27"/>
+          <p:cNvPr id="29" name="Rectangle 28"/>
           <p:cNvSpPr/>
           <p:nvPr/>
         </p:nvSpPr>
@@ -13596,7 +13970,7 @@
       </p:sp>
       <p:sp>
         <p:nvSpPr>
-          <p:cNvPr id="29" name="TextBox 28"/>
+          <p:cNvPr id="30" name="TextBox 29"/>
           <p:cNvSpPr txBox="1"/>
           <p:nvPr/>
         </p:nvSpPr>
@@ -13630,7 +14004,7 @@
       </p:sp>
       <p:sp>
         <p:nvSpPr>
-          <p:cNvPr id="30" name="TextBox 29"/>
+          <p:cNvPr id="31" name="TextBox 30"/>
           <p:cNvSpPr txBox="1"/>
           <p:nvPr/>
         </p:nvSpPr>
@@ -13664,7 +14038,7 @@
       </p:sp>
       <p:sp>
         <p:nvSpPr>
-          <p:cNvPr id="31" name="Rectangle 30"/>
+          <p:cNvPr id="32" name="Rectangle 31"/>
           <p:cNvSpPr/>
           <p:nvPr/>
         </p:nvSpPr>
@@ -13709,7 +14083,7 @@
       </p:sp>
       <p:sp>
         <p:nvSpPr>
-          <p:cNvPr id="32" name="TextBox 31"/>
+          <p:cNvPr id="33" name="TextBox 32"/>
           <p:cNvSpPr txBox="1"/>
           <p:nvPr/>
         </p:nvSpPr>
@@ -13743,7 +14117,7 @@
       </p:sp>
       <p:sp>
         <p:nvSpPr>
-          <p:cNvPr id="33" name="TextBox 32"/>
+          <p:cNvPr id="34" name="TextBox 33"/>
           <p:cNvSpPr txBox="1"/>
           <p:nvPr/>
         </p:nvSpPr>
@@ -13777,7 +14151,7 @@
       </p:sp>
       <p:sp>
         <p:nvSpPr>
-          <p:cNvPr id="34" name="Rectangle 33"/>
+          <p:cNvPr id="35" name="Rectangle 34"/>
           <p:cNvSpPr/>
           <p:nvPr/>
         </p:nvSpPr>
@@ -13822,7 +14196,7 @@
       </p:sp>
       <p:sp>
         <p:nvSpPr>
-          <p:cNvPr id="35" name="TextBox 34"/>
+          <p:cNvPr id="36" name="TextBox 35"/>
           <p:cNvSpPr txBox="1"/>
           <p:nvPr/>
         </p:nvSpPr>
@@ -13856,7 +14230,7 @@
       </p:sp>
       <p:sp>
         <p:nvSpPr>
-          <p:cNvPr id="36" name="TextBox 35"/>
+          <p:cNvPr id="37" name="TextBox 36"/>
           <p:cNvSpPr txBox="1"/>
           <p:nvPr/>
         </p:nvSpPr>
@@ -13890,7 +14264,7 @@
       </p:sp>
       <p:sp>
         <p:nvSpPr>
-          <p:cNvPr id="37" name="Rectangle 36"/>
+          <p:cNvPr id="38" name="Rectangle 37"/>
           <p:cNvSpPr/>
           <p:nvPr/>
         </p:nvSpPr>
@@ -13935,7 +14309,7 @@
       </p:sp>
       <p:sp>
         <p:nvSpPr>
-          <p:cNvPr id="38" name="TextBox 37"/>
+          <p:cNvPr id="39" name="TextBox 38"/>
           <p:cNvSpPr txBox="1"/>
           <p:nvPr/>
         </p:nvSpPr>
@@ -13969,7 +14343,7 @@
       </p:sp>
       <p:sp>
         <p:nvSpPr>
-          <p:cNvPr id="39" name="TextBox 38"/>
+          <p:cNvPr id="40" name="TextBox 39"/>
           <p:cNvSpPr txBox="1"/>
           <p:nvPr/>
         </p:nvSpPr>
@@ -14003,7 +14377,7 @@
       </p:sp>
       <p:sp>
         <p:nvSpPr>
-          <p:cNvPr id="40" name="Rectangle 39"/>
+          <p:cNvPr id="41" name="Rectangle 40"/>
           <p:cNvSpPr/>
           <p:nvPr/>
         </p:nvSpPr>
@@ -14048,7 +14422,7 @@
       </p:sp>
       <p:sp>
         <p:nvSpPr>
-          <p:cNvPr id="41" name="TextBox 40"/>
+          <p:cNvPr id="42" name="TextBox 41"/>
           <p:cNvSpPr txBox="1"/>
           <p:nvPr/>
         </p:nvSpPr>
@@ -14082,7 +14456,7 @@
       </p:sp>
       <p:sp>
         <p:nvSpPr>
-          <p:cNvPr id="42" name="TextBox 41"/>
+          <p:cNvPr id="43" name="TextBox 42"/>
           <p:cNvSpPr txBox="1"/>
           <p:nvPr/>
         </p:nvSpPr>
@@ -14116,7 +14490,7 @@
       </p:sp>
       <p:sp>
         <p:nvSpPr>
-          <p:cNvPr id="43" name="Rectangle 42"/>
+          <p:cNvPr id="44" name="Rectangle 43"/>
           <p:cNvSpPr/>
           <p:nvPr/>
         </p:nvSpPr>
@@ -14161,7 +14535,7 @@
       </p:sp>
       <p:sp>
         <p:nvSpPr>
-          <p:cNvPr id="44" name="TextBox 43"/>
+          <p:cNvPr id="45" name="TextBox 44"/>
           <p:cNvSpPr txBox="1"/>
           <p:nvPr/>
         </p:nvSpPr>
@@ -14195,7 +14569,7 @@
       </p:sp>
       <p:sp>
         <p:nvSpPr>
-          <p:cNvPr id="45" name="TextBox 44"/>
+          <p:cNvPr id="46" name="TextBox 45"/>
           <p:cNvSpPr txBox="1"/>
           <p:nvPr/>
         </p:nvSpPr>
@@ -14229,7 +14603,7 @@
       </p:sp>
       <p:sp>
         <p:nvSpPr>
-          <p:cNvPr id="46" name="Rectangle 45"/>
+          <p:cNvPr id="47" name="Rectangle 46"/>
           <p:cNvSpPr/>
           <p:nvPr/>
         </p:nvSpPr>
@@ -14274,7 +14648,7 @@
       </p:sp>
       <p:sp>
         <p:nvSpPr>
-          <p:cNvPr id="47" name="TextBox 46"/>
+          <p:cNvPr id="48" name="TextBox 47"/>
           <p:cNvSpPr txBox="1"/>
           <p:nvPr/>
         </p:nvSpPr>
@@ -14308,7 +14682,7 @@
       </p:sp>
       <p:sp>
         <p:nvSpPr>
-          <p:cNvPr id="48" name="TextBox 47"/>
+          <p:cNvPr id="49" name="TextBox 48"/>
           <p:cNvSpPr txBox="1"/>
           <p:nvPr/>
         </p:nvSpPr>
@@ -14342,7 +14716,7 @@
       </p:sp>
       <p:sp>
         <p:nvSpPr>
-          <p:cNvPr id="49" name="Rectangle 48"/>
+          <p:cNvPr id="50" name="Rectangle 49"/>
           <p:cNvSpPr/>
           <p:nvPr/>
         </p:nvSpPr>
@@ -14387,7 +14761,7 @@
       </p:sp>
       <p:sp>
         <p:nvSpPr>
-          <p:cNvPr id="50" name="TextBox 49"/>
+          <p:cNvPr id="51" name="TextBox 50"/>
           <p:cNvSpPr txBox="1"/>
           <p:nvPr/>
         </p:nvSpPr>
@@ -14421,7 +14795,7 @@
       </p:sp>
       <p:sp>
         <p:nvSpPr>
-          <p:cNvPr id="51" name="TextBox 50"/>
+          <p:cNvPr id="52" name="TextBox 51"/>
           <p:cNvSpPr txBox="1"/>
           <p:nvPr/>
         </p:nvSpPr>
@@ -14455,7 +14829,7 @@
       </p:sp>
       <p:sp>
         <p:nvSpPr>
-          <p:cNvPr id="52" name="Rectangle 51"/>
+          <p:cNvPr id="53" name="Rectangle 52"/>
           <p:cNvSpPr/>
           <p:nvPr/>
         </p:nvSpPr>
@@ -14500,7 +14874,7 @@
       </p:sp>
       <p:sp>
         <p:nvSpPr>
-          <p:cNvPr id="53" name="TextBox 52"/>
+          <p:cNvPr id="54" name="TextBox 53"/>
           <p:cNvSpPr txBox="1"/>
           <p:nvPr/>
         </p:nvSpPr>
@@ -14534,7 +14908,7 @@
       </p:sp>
       <p:sp>
         <p:nvSpPr>
-          <p:cNvPr id="54" name="TextBox 53"/>
+          <p:cNvPr id="55" name="TextBox 54"/>
           <p:cNvSpPr txBox="1"/>
           <p:nvPr/>
         </p:nvSpPr>
@@ -14568,7 +14942,7 @@
       </p:sp>
       <p:sp>
         <p:nvSpPr>
-          <p:cNvPr id="55" name="Rectangle 54"/>
+          <p:cNvPr id="56" name="Rectangle 55"/>
           <p:cNvSpPr/>
           <p:nvPr/>
         </p:nvSpPr>
@@ -14613,7 +14987,7 @@
       </p:sp>
       <p:sp>
         <p:nvSpPr>
-          <p:cNvPr id="56" name="TextBox 55"/>
+          <p:cNvPr id="57" name="TextBox 56"/>
           <p:cNvSpPr txBox="1"/>
           <p:nvPr/>
         </p:nvSpPr>
@@ -14647,7 +15021,7 @@
       </p:sp>
       <p:sp>
         <p:nvSpPr>
-          <p:cNvPr id="57" name="TextBox 56"/>
+          <p:cNvPr id="58" name="TextBox 57"/>
           <p:cNvSpPr txBox="1"/>
           <p:nvPr/>
         </p:nvSpPr>
@@ -14681,7 +15055,7 @@
       </p:sp>
       <p:sp>
         <p:nvSpPr>
-          <p:cNvPr id="58" name="Rectangle 57"/>
+          <p:cNvPr id="59" name="Rectangle 58"/>
           <p:cNvSpPr/>
           <p:nvPr/>
         </p:nvSpPr>
@@ -14726,7 +15100,7 @@
       </p:sp>
       <p:sp>
         <p:nvSpPr>
-          <p:cNvPr id="59" name="TextBox 58"/>
+          <p:cNvPr id="60" name="TextBox 59"/>
           <p:cNvSpPr txBox="1"/>
           <p:nvPr/>
         </p:nvSpPr>
@@ -14760,7 +15134,7 @@
       </p:sp>
       <p:sp>
         <p:nvSpPr>
-          <p:cNvPr id="60" name="TextBox 59"/>
+          <p:cNvPr id="61" name="TextBox 60"/>
           <p:cNvSpPr txBox="1"/>
           <p:nvPr/>
         </p:nvSpPr>
@@ -14794,7 +15168,7 @@
       </p:sp>
       <p:sp>
         <p:nvSpPr>
-          <p:cNvPr id="61" name="Rectangle 60"/>
+          <p:cNvPr id="62" name="Rectangle 61"/>
           <p:cNvSpPr/>
           <p:nvPr/>
         </p:nvSpPr>
@@ -14839,7 +15213,7 @@
       </p:sp>
       <p:sp>
         <p:nvSpPr>
-          <p:cNvPr id="62" name="TextBox 61"/>
+          <p:cNvPr id="63" name="TextBox 62"/>
           <p:cNvSpPr txBox="1"/>
           <p:nvPr/>
         </p:nvSpPr>
@@ -14873,7 +15247,7 @@
       </p:sp>
       <p:sp>
         <p:nvSpPr>
-          <p:cNvPr id="63" name="TextBox 62"/>
+          <p:cNvPr id="64" name="TextBox 63"/>
           <p:cNvSpPr txBox="1"/>
           <p:nvPr/>
         </p:nvSpPr>
@@ -14901,6 +15275,40 @@
                 </a:solidFill>
               </a:rPr>
               <a:t>ダークモード対応は別 issue で</a:t>
+            </a:r>
+          </a:p>
+        </p:txBody>
+      </p:sp>
+      <p:sp>
+        <p:nvSpPr>
+          <p:cNvPr id="65" name="TextBox 64"/>
+          <p:cNvSpPr txBox="1"/>
+          <p:nvPr/>
+        </p:nvSpPr>
+        <p:spPr>
+          <a:xfrm>
+            <a:off x="304800" y="8343900"/>
+            <a:ext cx="14630400" cy="190500"/>
+          </a:xfrm>
+          <a:prstGeom prst="rect">
+            <a:avLst/>
+          </a:prstGeom>
+          <a:noFill/>
+        </p:spPr>
+        <p:txBody>
+          <a:bodyPr wrap="square" lIns="0" rIns="0" tIns="0" bIns="0">
+            <a:spAutoFit/>
+          </a:bodyPr>
+          <a:lstStyle/>
+          <a:p>
+            <a:pPr algn="l"/>
+            <a:r>
+              <a:rPr sz="900" b="0">
+                <a:solidFill>
+                  <a:srgbClr val="6B7280"/>
+                </a:solidFill>
+              </a:rPr>
+              <a:t>Design System Team / Draft v0.7</a:t>
             </a:r>
           </a:p>
         </p:txBody>
@@ -14957,9 +15365,43 @@
           </a:p>
         </p:txBody>
       </p:sp>
+      <p:sp>
+        <p:nvSpPr>
+          <p:cNvPr id="3" name="TextBox 2"/>
+          <p:cNvSpPr txBox="1"/>
+          <p:nvPr/>
+        </p:nvSpPr>
+        <p:spPr>
+          <a:xfrm>
+            <a:off x="304800" y="571500"/>
+            <a:ext cx="14630400" cy="228600"/>
+          </a:xfrm>
+          <a:prstGeom prst="rect">
+            <a:avLst/>
+          </a:prstGeom>
+          <a:noFill/>
+        </p:spPr>
+        <p:txBody>
+          <a:bodyPr wrap="square" lIns="0" rIns="0" tIns="0" bIns="0">
+            <a:spAutoFit/>
+          </a:bodyPr>
+          <a:lstStyle/>
+          <a:p>
+            <a:pPr algn="l"/>
+            <a:r>
+              <a:rPr sz="1100" b="0">
+                <a:solidFill>
+                  <a:srgbClr val="6B7280"/>
+                </a:solidFill>
+              </a:rPr>
+              <a:t>Period: 2026 Q1 | Total: 365M JPY | Code: Python 3.13</a:t>
+            </a:r>
+          </a:p>
+        </p:txBody>
+      </p:sp>
       <p:cxnSp>
         <p:nvCxnSpPr>
-          <p:cNvPr id="3" name="Connector 2"/>
+          <p:cNvPr id="4" name="Connector 3"/>
           <p:cNvCxnSpPr/>
           <p:nvPr/>
         </p:nvCxnSpPr>
@@ -14994,7 +15436,7 @@
       </p:cxnSp>
       <p:sp>
         <p:nvSpPr>
-          <p:cNvPr id="4" name="Rectangle 3"/>
+          <p:cNvPr id="5" name="Rectangle 4"/>
           <p:cNvSpPr/>
           <p:nvPr/>
         </p:nvSpPr>
@@ -15039,7 +15481,7 @@
       </p:sp>
       <p:sp>
         <p:nvSpPr>
-          <p:cNvPr id="5" name="Rectangle 4"/>
+          <p:cNvPr id="6" name="Rectangle 5"/>
           <p:cNvSpPr/>
           <p:nvPr/>
         </p:nvSpPr>
@@ -15084,7 +15526,7 @@
       </p:sp>
       <p:sp>
         <p:nvSpPr>
-          <p:cNvPr id="6" name="TextBox 5"/>
+          <p:cNvPr id="7" name="TextBox 6"/>
           <p:cNvSpPr txBox="1"/>
           <p:nvPr/>
         </p:nvSpPr>
@@ -15118,7 +15560,7 @@
       </p:sp>
       <p:sp>
         <p:nvSpPr>
-          <p:cNvPr id="7" name="Rectangle 6"/>
+          <p:cNvPr id="8" name="Rectangle 7"/>
           <p:cNvSpPr/>
           <p:nvPr/>
         </p:nvSpPr>
@@ -15163,7 +15605,7 @@
       </p:sp>
       <p:sp>
         <p:nvSpPr>
-          <p:cNvPr id="8" name="TextBox 7"/>
+          <p:cNvPr id="9" name="TextBox 8"/>
           <p:cNvSpPr txBox="1"/>
           <p:nvPr/>
         </p:nvSpPr>
@@ -15197,7 +15639,7 @@
       </p:sp>
       <p:sp>
         <p:nvSpPr>
-          <p:cNvPr id="9" name="Rectangle 8"/>
+          <p:cNvPr id="10" name="Rectangle 9"/>
           <p:cNvSpPr/>
           <p:nvPr/>
         </p:nvSpPr>
@@ -15242,7 +15684,7 @@
       </p:sp>
       <p:sp>
         <p:nvSpPr>
-          <p:cNvPr id="10" name="TextBox 9"/>
+          <p:cNvPr id="11" name="TextBox 10"/>
           <p:cNvSpPr txBox="1"/>
           <p:nvPr/>
         </p:nvSpPr>
@@ -15276,7 +15718,7 @@
       </p:sp>
       <p:sp>
         <p:nvSpPr>
-          <p:cNvPr id="11" name="Rectangle 10"/>
+          <p:cNvPr id="12" name="Rectangle 11"/>
           <p:cNvSpPr/>
           <p:nvPr/>
         </p:nvSpPr>
@@ -15321,7 +15763,7 @@
       </p:sp>
       <p:sp>
         <p:nvSpPr>
-          <p:cNvPr id="12" name="TextBox 11"/>
+          <p:cNvPr id="13" name="TextBox 12"/>
           <p:cNvSpPr txBox="1"/>
           <p:nvPr/>
         </p:nvSpPr>
@@ -15355,7 +15797,7 @@
       </p:sp>
       <p:sp>
         <p:nvSpPr>
-          <p:cNvPr id="13" name="Rectangle 12"/>
+          <p:cNvPr id="14" name="Rectangle 13"/>
           <p:cNvSpPr/>
           <p:nvPr/>
         </p:nvSpPr>
@@ -15400,7 +15842,7 @@
       </p:sp>
       <p:sp>
         <p:nvSpPr>
-          <p:cNvPr id="14" name="TextBox 13"/>
+          <p:cNvPr id="15" name="TextBox 14"/>
           <p:cNvSpPr txBox="1"/>
           <p:nvPr/>
         </p:nvSpPr>
@@ -15434,7 +15876,7 @@
       </p:sp>
       <p:sp>
         <p:nvSpPr>
-          <p:cNvPr id="15" name="Rectangle 14"/>
+          <p:cNvPr id="16" name="Rectangle 15"/>
           <p:cNvSpPr/>
           <p:nvPr/>
         </p:nvSpPr>
@@ -15479,7 +15921,7 @@
       </p:sp>
       <p:sp>
         <p:nvSpPr>
-          <p:cNvPr id="16" name="TextBox 15"/>
+          <p:cNvPr id="17" name="TextBox 16"/>
           <p:cNvSpPr txBox="1"/>
           <p:nvPr/>
         </p:nvSpPr>
@@ -15513,7 +15955,7 @@
       </p:sp>
       <p:sp>
         <p:nvSpPr>
-          <p:cNvPr id="17" name="Rectangle 16"/>
+          <p:cNvPr id="18" name="Rectangle 17"/>
           <p:cNvSpPr/>
           <p:nvPr/>
         </p:nvSpPr>
@@ -15558,7 +16000,7 @@
       </p:sp>
       <p:sp>
         <p:nvSpPr>
-          <p:cNvPr id="18" name="TextBox 17"/>
+          <p:cNvPr id="19" name="TextBox 18"/>
           <p:cNvSpPr txBox="1"/>
           <p:nvPr/>
         </p:nvSpPr>
@@ -15592,7 +16034,7 @@
       </p:sp>
       <p:sp>
         <p:nvSpPr>
-          <p:cNvPr id="19" name="Rectangle 18"/>
+          <p:cNvPr id="20" name="Rectangle 19"/>
           <p:cNvSpPr/>
           <p:nvPr/>
         </p:nvSpPr>
@@ -15637,7 +16079,7 @@
       </p:sp>
       <p:sp>
         <p:nvSpPr>
-          <p:cNvPr id="20" name="TextBox 19"/>
+          <p:cNvPr id="21" name="TextBox 20"/>
           <p:cNvSpPr txBox="1"/>
           <p:nvPr/>
         </p:nvSpPr>
@@ -15671,7 +16113,7 @@
       </p:sp>
       <p:sp>
         <p:nvSpPr>
-          <p:cNvPr id="21" name="Rectangle 20"/>
+          <p:cNvPr id="22" name="Rectangle 21"/>
           <p:cNvSpPr/>
           <p:nvPr/>
         </p:nvSpPr>
@@ -15716,7 +16158,7 @@
       </p:sp>
       <p:sp>
         <p:nvSpPr>
-          <p:cNvPr id="22" name="TextBox 21"/>
+          <p:cNvPr id="23" name="TextBox 22"/>
           <p:cNvSpPr txBox="1"/>
           <p:nvPr/>
         </p:nvSpPr>
@@ -15750,7 +16192,7 @@
       </p:sp>
       <p:sp>
         <p:nvSpPr>
-          <p:cNvPr id="23" name="Rectangle 22"/>
+          <p:cNvPr id="24" name="Rectangle 23"/>
           <p:cNvSpPr/>
           <p:nvPr/>
         </p:nvSpPr>
@@ -15795,7 +16237,7 @@
       </p:sp>
       <p:sp>
         <p:nvSpPr>
-          <p:cNvPr id="24" name="TextBox 23"/>
+          <p:cNvPr id="25" name="TextBox 24"/>
           <p:cNvSpPr txBox="1"/>
           <p:nvPr/>
         </p:nvSpPr>
@@ -15829,7 +16271,7 @@
       </p:sp>
       <p:sp>
         <p:nvSpPr>
-          <p:cNvPr id="25" name="Rectangle 24"/>
+          <p:cNvPr id="26" name="Rectangle 25"/>
           <p:cNvSpPr/>
           <p:nvPr/>
         </p:nvSpPr>
@@ -15874,7 +16316,7 @@
       </p:sp>
       <p:sp>
         <p:nvSpPr>
-          <p:cNvPr id="26" name="TextBox 25"/>
+          <p:cNvPr id="27" name="TextBox 26"/>
           <p:cNvSpPr txBox="1"/>
           <p:nvPr/>
         </p:nvSpPr>
@@ -15908,7 +16350,7 @@
       </p:sp>
       <p:sp>
         <p:nvSpPr>
-          <p:cNvPr id="27" name="Rectangle 26"/>
+          <p:cNvPr id="28" name="Rectangle 27"/>
           <p:cNvSpPr/>
           <p:nvPr/>
         </p:nvSpPr>
@@ -15953,7 +16395,7 @@
       </p:sp>
       <p:sp>
         <p:nvSpPr>
-          <p:cNvPr id="28" name="TextBox 27"/>
+          <p:cNvPr id="29" name="TextBox 28"/>
           <p:cNvSpPr txBox="1"/>
           <p:nvPr/>
         </p:nvSpPr>
@@ -15987,7 +16429,7 @@
       </p:sp>
       <p:sp>
         <p:nvSpPr>
-          <p:cNvPr id="29" name="Rectangle 28"/>
+          <p:cNvPr id="30" name="Rectangle 29"/>
           <p:cNvSpPr/>
           <p:nvPr/>
         </p:nvSpPr>
@@ -16032,7 +16474,7 @@
       </p:sp>
       <p:sp>
         <p:nvSpPr>
-          <p:cNvPr id="30" name="TextBox 29"/>
+          <p:cNvPr id="31" name="TextBox 30"/>
           <p:cNvSpPr txBox="1"/>
           <p:nvPr/>
         </p:nvSpPr>
@@ -16066,7 +16508,7 @@
       </p:sp>
       <p:sp>
         <p:nvSpPr>
-          <p:cNvPr id="31" name="Rectangle 30"/>
+          <p:cNvPr id="32" name="Rectangle 31"/>
           <p:cNvSpPr/>
           <p:nvPr/>
         </p:nvSpPr>
@@ -16111,7 +16553,7 @@
       </p:sp>
       <p:sp>
         <p:nvSpPr>
-          <p:cNvPr id="32" name="TextBox 31"/>
+          <p:cNvPr id="33" name="TextBox 32"/>
           <p:cNvSpPr txBox="1"/>
           <p:nvPr/>
         </p:nvSpPr>
@@ -16145,7 +16587,7 @@
       </p:sp>
       <p:sp>
         <p:nvSpPr>
-          <p:cNvPr id="33" name="Rectangle 32"/>
+          <p:cNvPr id="34" name="Rectangle 33"/>
           <p:cNvSpPr/>
           <p:nvPr/>
         </p:nvSpPr>
@@ -16190,7 +16632,7 @@
       </p:sp>
       <p:sp>
         <p:nvSpPr>
-          <p:cNvPr id="34" name="TextBox 33"/>
+          <p:cNvPr id="35" name="TextBox 34"/>
           <p:cNvSpPr txBox="1"/>
           <p:nvPr/>
         </p:nvSpPr>
@@ -16224,7 +16666,7 @@
       </p:sp>
       <p:sp>
         <p:nvSpPr>
-          <p:cNvPr id="35" name="Rectangle 34"/>
+          <p:cNvPr id="36" name="Rectangle 35"/>
           <p:cNvSpPr/>
           <p:nvPr/>
         </p:nvSpPr>
@@ -16269,7 +16711,7 @@
       </p:sp>
       <p:sp>
         <p:nvSpPr>
-          <p:cNvPr id="36" name="TextBox 35"/>
+          <p:cNvPr id="37" name="TextBox 36"/>
           <p:cNvSpPr txBox="1"/>
           <p:nvPr/>
         </p:nvSpPr>
@@ -16303,7 +16745,7 @@
       </p:sp>
       <p:sp>
         <p:nvSpPr>
-          <p:cNvPr id="37" name="Rectangle 36"/>
+          <p:cNvPr id="38" name="Rectangle 37"/>
           <p:cNvSpPr/>
           <p:nvPr/>
         </p:nvSpPr>
@@ -16348,7 +16790,7 @@
       </p:sp>
       <p:sp>
         <p:nvSpPr>
-          <p:cNvPr id="38" name="TextBox 37"/>
+          <p:cNvPr id="39" name="TextBox 38"/>
           <p:cNvSpPr txBox="1"/>
           <p:nvPr/>
         </p:nvSpPr>
@@ -16382,7 +16824,7 @@
       </p:sp>
       <p:sp>
         <p:nvSpPr>
-          <p:cNvPr id="39" name="Rectangle 38"/>
+          <p:cNvPr id="40" name="Rectangle 39"/>
           <p:cNvSpPr/>
           <p:nvPr/>
         </p:nvSpPr>
@@ -16427,7 +16869,7 @@
       </p:sp>
       <p:sp>
         <p:nvSpPr>
-          <p:cNvPr id="40" name="TextBox 39"/>
+          <p:cNvPr id="41" name="TextBox 40"/>
           <p:cNvSpPr txBox="1"/>
           <p:nvPr/>
         </p:nvSpPr>
@@ -16461,7 +16903,7 @@
       </p:sp>
       <p:sp>
         <p:nvSpPr>
-          <p:cNvPr id="41" name="Rectangle 40"/>
+          <p:cNvPr id="42" name="Rectangle 41"/>
           <p:cNvSpPr/>
           <p:nvPr/>
         </p:nvSpPr>
@@ -16506,7 +16948,7 @@
       </p:sp>
       <p:sp>
         <p:nvSpPr>
-          <p:cNvPr id="42" name="TextBox 41"/>
+          <p:cNvPr id="43" name="TextBox 42"/>
           <p:cNvSpPr txBox="1"/>
           <p:nvPr/>
         </p:nvSpPr>
@@ -16540,7 +16982,7 @@
       </p:sp>
       <p:sp>
         <p:nvSpPr>
-          <p:cNvPr id="43" name="Rectangle 42"/>
+          <p:cNvPr id="44" name="Rectangle 43"/>
           <p:cNvSpPr/>
           <p:nvPr/>
         </p:nvSpPr>
@@ -16585,7 +17027,7 @@
       </p:sp>
       <p:sp>
         <p:nvSpPr>
-          <p:cNvPr id="44" name="TextBox 43"/>
+          <p:cNvPr id="45" name="TextBox 44"/>
           <p:cNvSpPr txBox="1"/>
           <p:nvPr/>
         </p:nvSpPr>
@@ -16619,7 +17061,7 @@
       </p:sp>
       <p:sp>
         <p:nvSpPr>
-          <p:cNvPr id="45" name="Rectangle 44"/>
+          <p:cNvPr id="46" name="Rectangle 45"/>
           <p:cNvSpPr/>
           <p:nvPr/>
         </p:nvSpPr>
@@ -16664,7 +17106,7 @@
       </p:sp>
       <p:sp>
         <p:nvSpPr>
-          <p:cNvPr id="46" name="TextBox 45"/>
+          <p:cNvPr id="47" name="TextBox 46"/>
           <p:cNvSpPr txBox="1"/>
           <p:nvPr/>
         </p:nvSpPr>
@@ -16698,7 +17140,7 @@
       </p:sp>
       <p:sp>
         <p:nvSpPr>
-          <p:cNvPr id="47" name="Rectangle 46"/>
+          <p:cNvPr id="48" name="Rectangle 47"/>
           <p:cNvSpPr/>
           <p:nvPr/>
         </p:nvSpPr>
@@ -16743,7 +17185,7 @@
       </p:sp>
       <p:sp>
         <p:nvSpPr>
-          <p:cNvPr id="48" name="TextBox 47"/>
+          <p:cNvPr id="49" name="TextBox 48"/>
           <p:cNvSpPr txBox="1"/>
           <p:nvPr/>
         </p:nvSpPr>
@@ -16777,7 +17219,7 @@
       </p:sp>
       <p:sp>
         <p:nvSpPr>
-          <p:cNvPr id="49" name="Rectangle 48"/>
+          <p:cNvPr id="50" name="Rectangle 49"/>
           <p:cNvSpPr/>
           <p:nvPr/>
         </p:nvSpPr>
@@ -16822,7 +17264,7 @@
       </p:sp>
       <p:sp>
         <p:nvSpPr>
-          <p:cNvPr id="50" name="TextBox 49"/>
+          <p:cNvPr id="51" name="TextBox 50"/>
           <p:cNvSpPr txBox="1"/>
           <p:nvPr/>
         </p:nvSpPr>
@@ -16856,7 +17298,7 @@
       </p:sp>
       <p:sp>
         <p:nvSpPr>
-          <p:cNvPr id="51" name="Rectangle 50"/>
+          <p:cNvPr id="52" name="Rectangle 51"/>
           <p:cNvSpPr/>
           <p:nvPr/>
         </p:nvSpPr>
@@ -16901,7 +17343,7 @@
       </p:sp>
       <p:sp>
         <p:nvSpPr>
-          <p:cNvPr id="52" name="TextBox 51"/>
+          <p:cNvPr id="53" name="TextBox 52"/>
           <p:cNvSpPr txBox="1"/>
           <p:nvPr/>
         </p:nvSpPr>
@@ -16935,7 +17377,7 @@
       </p:sp>
       <p:sp>
         <p:nvSpPr>
-          <p:cNvPr id="53" name="Rectangle 52"/>
+          <p:cNvPr id="54" name="Rectangle 53"/>
           <p:cNvSpPr/>
           <p:nvPr/>
         </p:nvSpPr>
@@ -16980,7 +17422,7 @@
       </p:sp>
       <p:sp>
         <p:nvSpPr>
-          <p:cNvPr id="54" name="TextBox 53"/>
+          <p:cNvPr id="55" name="TextBox 54"/>
           <p:cNvSpPr txBox="1"/>
           <p:nvPr/>
         </p:nvSpPr>
@@ -17014,7 +17456,7 @@
       </p:sp>
       <p:sp>
         <p:nvSpPr>
-          <p:cNvPr id="55" name="Rectangle 54"/>
+          <p:cNvPr id="56" name="Rectangle 55"/>
           <p:cNvSpPr/>
           <p:nvPr/>
         </p:nvSpPr>
@@ -17059,7 +17501,7 @@
       </p:sp>
       <p:sp>
         <p:nvSpPr>
-          <p:cNvPr id="56" name="TextBox 55"/>
+          <p:cNvPr id="57" name="TextBox 56"/>
           <p:cNvSpPr txBox="1"/>
           <p:nvPr/>
         </p:nvSpPr>
@@ -17093,7 +17535,7 @@
       </p:sp>
       <p:sp>
         <p:nvSpPr>
-          <p:cNvPr id="57" name="Rectangle 56"/>
+          <p:cNvPr id="58" name="Rectangle 57"/>
           <p:cNvSpPr/>
           <p:nvPr/>
         </p:nvSpPr>
@@ -17138,7 +17580,7 @@
       </p:sp>
       <p:sp>
         <p:nvSpPr>
-          <p:cNvPr id="58" name="Rectangle 57"/>
+          <p:cNvPr id="59" name="Rectangle 58"/>
           <p:cNvSpPr/>
           <p:nvPr/>
         </p:nvSpPr>
@@ -17183,7 +17625,7 @@
       </p:sp>
       <p:sp>
         <p:nvSpPr>
-          <p:cNvPr id="59" name="TextBox 58"/>
+          <p:cNvPr id="60" name="TextBox 59"/>
           <p:cNvSpPr txBox="1"/>
           <p:nvPr/>
         </p:nvSpPr>
@@ -17217,7 +17659,7 @@
       </p:sp>
       <p:sp>
         <p:nvSpPr>
-          <p:cNvPr id="60" name="Rectangle 59"/>
+          <p:cNvPr id="61" name="Rectangle 60"/>
           <p:cNvSpPr/>
           <p:nvPr/>
         </p:nvSpPr>
@@ -17262,7 +17704,7 @@
       </p:sp>
       <p:sp>
         <p:nvSpPr>
-          <p:cNvPr id="61" name="TextBox 60"/>
+          <p:cNvPr id="62" name="TextBox 61"/>
           <p:cNvSpPr txBox="1"/>
           <p:nvPr/>
         </p:nvSpPr>
@@ -17296,7 +17738,7 @@
       </p:sp>
       <p:sp>
         <p:nvSpPr>
-          <p:cNvPr id="62" name="TextBox 61"/>
+          <p:cNvPr id="63" name="TextBox 62"/>
           <p:cNvSpPr txBox="1"/>
           <p:nvPr/>
         </p:nvSpPr>
@@ -17330,7 +17772,7 @@
       </p:sp>
       <p:sp>
         <p:nvSpPr>
-          <p:cNvPr id="63" name="Rectangle 62"/>
+          <p:cNvPr id="64" name="Rectangle 63"/>
           <p:cNvSpPr/>
           <p:nvPr/>
         </p:nvSpPr>
@@ -17375,7 +17817,7 @@
       </p:sp>
       <p:sp>
         <p:nvSpPr>
-          <p:cNvPr id="64" name="TextBox 63"/>
+          <p:cNvPr id="65" name="TextBox 64"/>
           <p:cNvSpPr txBox="1"/>
           <p:nvPr/>
         </p:nvSpPr>
@@ -17409,7 +17851,7 @@
       </p:sp>
       <p:sp>
         <p:nvSpPr>
-          <p:cNvPr id="65" name="TextBox 64"/>
+          <p:cNvPr id="66" name="TextBox 65"/>
           <p:cNvSpPr txBox="1"/>
           <p:nvPr/>
         </p:nvSpPr>
@@ -17443,7 +17885,7 @@
       </p:sp>
       <p:sp>
         <p:nvSpPr>
-          <p:cNvPr id="66" name="Rectangle 65"/>
+          <p:cNvPr id="67" name="Rectangle 66"/>
           <p:cNvSpPr/>
           <p:nvPr/>
         </p:nvSpPr>
@@ -17488,7 +17930,7 @@
       </p:sp>
       <p:sp>
         <p:nvSpPr>
-          <p:cNvPr id="67" name="TextBox 66"/>
+          <p:cNvPr id="68" name="TextBox 67"/>
           <p:cNvSpPr txBox="1"/>
           <p:nvPr/>
         </p:nvSpPr>
@@ -17522,7 +17964,7 @@
       </p:sp>
       <p:sp>
         <p:nvSpPr>
-          <p:cNvPr id="68" name="TextBox 67"/>
+          <p:cNvPr id="69" name="TextBox 68"/>
           <p:cNvSpPr txBox="1"/>
           <p:nvPr/>
         </p:nvSpPr>
@@ -17556,7 +17998,7 @@
       </p:sp>
       <p:sp>
         <p:nvSpPr>
-          <p:cNvPr id="69" name="Rectangle 68"/>
+          <p:cNvPr id="70" name="Rectangle 69"/>
           <p:cNvSpPr/>
           <p:nvPr/>
         </p:nvSpPr>
@@ -17601,7 +18043,7 @@
       </p:sp>
       <p:sp>
         <p:nvSpPr>
-          <p:cNvPr id="70" name="TextBox 69"/>
+          <p:cNvPr id="71" name="TextBox 70"/>
           <p:cNvSpPr txBox="1"/>
           <p:nvPr/>
         </p:nvSpPr>
@@ -17635,7 +18077,7 @@
       </p:sp>
       <p:sp>
         <p:nvSpPr>
-          <p:cNvPr id="71" name="TextBox 70"/>
+          <p:cNvPr id="72" name="TextBox 71"/>
           <p:cNvSpPr txBox="1"/>
           <p:nvPr/>
         </p:nvSpPr>
@@ -17669,7 +18111,7 @@
       </p:sp>
       <p:sp>
         <p:nvSpPr>
-          <p:cNvPr id="72" name="Rectangle 71"/>
+          <p:cNvPr id="73" name="Rectangle 72"/>
           <p:cNvSpPr/>
           <p:nvPr/>
         </p:nvSpPr>
@@ -17714,7 +18156,7 @@
       </p:sp>
       <p:sp>
         <p:nvSpPr>
-          <p:cNvPr id="73" name="Rectangle 72"/>
+          <p:cNvPr id="74" name="Rectangle 73"/>
           <p:cNvSpPr/>
           <p:nvPr/>
         </p:nvSpPr>
@@ -17759,7 +18201,7 @@
       </p:sp>
       <p:sp>
         <p:nvSpPr>
-          <p:cNvPr id="74" name="TextBox 73"/>
+          <p:cNvPr id="75" name="TextBox 74"/>
           <p:cNvSpPr txBox="1"/>
           <p:nvPr/>
         </p:nvSpPr>
@@ -17793,7 +18235,7 @@
       </p:sp>
       <p:sp>
         <p:nvSpPr>
-          <p:cNvPr id="75" name="Rectangle 74"/>
+          <p:cNvPr id="76" name="Rectangle 75"/>
           <p:cNvSpPr/>
           <p:nvPr/>
         </p:nvSpPr>
@@ -17838,7 +18280,7 @@
       </p:sp>
       <p:sp>
         <p:nvSpPr>
-          <p:cNvPr id="76" name="TextBox 75"/>
+          <p:cNvPr id="77" name="TextBox 76"/>
           <p:cNvSpPr txBox="1"/>
           <p:nvPr/>
         </p:nvSpPr>
@@ -17872,7 +18314,7 @@
       </p:sp>
       <p:sp>
         <p:nvSpPr>
-          <p:cNvPr id="77" name="Rectangle 76"/>
+          <p:cNvPr id="78" name="Rectangle 77"/>
           <p:cNvSpPr/>
           <p:nvPr/>
         </p:nvSpPr>
@@ -17917,7 +18359,7 @@
       </p:sp>
       <p:sp>
         <p:nvSpPr>
-          <p:cNvPr id="78" name="Rectangle 77"/>
+          <p:cNvPr id="79" name="Rectangle 78"/>
           <p:cNvSpPr/>
           <p:nvPr/>
         </p:nvSpPr>
@@ -17962,7 +18404,7 @@
       </p:sp>
       <p:sp>
         <p:nvSpPr>
-          <p:cNvPr id="79" name="TextBox 78"/>
+          <p:cNvPr id="80" name="TextBox 79"/>
           <p:cNvSpPr txBox="1"/>
           <p:nvPr/>
         </p:nvSpPr>
@@ -17996,7 +18438,7 @@
       </p:sp>
       <p:sp>
         <p:nvSpPr>
-          <p:cNvPr id="80" name="Rectangle 79"/>
+          <p:cNvPr id="81" name="Rectangle 80"/>
           <p:cNvSpPr/>
           <p:nvPr/>
         </p:nvSpPr>
@@ -18041,7 +18483,7 @@
       </p:sp>
       <p:sp>
         <p:nvSpPr>
-          <p:cNvPr id="81" name="TextBox 80"/>
+          <p:cNvPr id="82" name="TextBox 81"/>
           <p:cNvSpPr txBox="1"/>
           <p:nvPr/>
         </p:nvSpPr>
@@ -18075,7 +18517,7 @@
       </p:sp>
       <p:sp>
         <p:nvSpPr>
-          <p:cNvPr id="82" name="TextBox 81"/>
+          <p:cNvPr id="83" name="TextBox 82"/>
           <p:cNvSpPr txBox="1"/>
           <p:nvPr/>
         </p:nvSpPr>
@@ -18109,7 +18551,7 @@
       </p:sp>
       <p:sp>
         <p:nvSpPr>
-          <p:cNvPr id="83" name="TextBox 82"/>
+          <p:cNvPr id="84" name="TextBox 83"/>
           <p:cNvSpPr txBox="1"/>
           <p:nvPr/>
         </p:nvSpPr>
@@ -18143,7 +18585,7 @@
       </p:sp>
       <p:sp>
         <p:nvSpPr>
-          <p:cNvPr id="84" name="TextBox 83"/>
+          <p:cNvPr id="85" name="TextBox 84"/>
           <p:cNvSpPr txBox="1"/>
           <p:nvPr/>
         </p:nvSpPr>
@@ -18177,7 +18619,7 @@
       </p:sp>
       <p:sp>
         <p:nvSpPr>
-          <p:cNvPr id="85" name="Rectangle 84"/>
+          <p:cNvPr id="86" name="Rectangle 85"/>
           <p:cNvSpPr/>
           <p:nvPr/>
         </p:nvSpPr>
@@ -18222,7 +18664,7 @@
       </p:sp>
       <p:sp>
         <p:nvSpPr>
-          <p:cNvPr id="86" name="Rectangle 85"/>
+          <p:cNvPr id="87" name="Rectangle 86"/>
           <p:cNvSpPr/>
           <p:nvPr/>
         </p:nvSpPr>
@@ -18267,7 +18709,7 @@
       </p:sp>
       <p:sp>
         <p:nvSpPr>
-          <p:cNvPr id="87" name="TextBox 86"/>
+          <p:cNvPr id="88" name="TextBox 87"/>
           <p:cNvSpPr txBox="1"/>
           <p:nvPr/>
         </p:nvSpPr>
@@ -18301,7 +18743,7 @@
       </p:sp>
       <p:sp>
         <p:nvSpPr>
-          <p:cNvPr id="88" name="TextBox 87"/>
+          <p:cNvPr id="89" name="TextBox 88"/>
           <p:cNvSpPr txBox="1"/>
           <p:nvPr/>
         </p:nvSpPr>
@@ -18335,7 +18777,7 @@
       </p:sp>
       <p:sp>
         <p:nvSpPr>
-          <p:cNvPr id="89" name="TextBox 88"/>
+          <p:cNvPr id="90" name="TextBox 89"/>
           <p:cNvSpPr txBox="1"/>
           <p:nvPr/>
         </p:nvSpPr>
@@ -18369,7 +18811,7 @@
       </p:sp>
       <p:sp>
         <p:nvSpPr>
-          <p:cNvPr id="90" name="TextBox 89"/>
+          <p:cNvPr id="91" name="TextBox 90"/>
           <p:cNvSpPr txBox="1"/>
           <p:nvPr/>
         </p:nvSpPr>
@@ -18397,6 +18839,40 @@
                 </a:solidFill>
               </a:rPr>
               <a:t>• スパイクは水曜 14 時台</a:t>
+            </a:r>
+          </a:p>
+        </p:txBody>
+      </p:sp>
+      <p:sp>
+        <p:nvSpPr>
+          <p:cNvPr id="92" name="TextBox 91"/>
+          <p:cNvSpPr txBox="1"/>
+          <p:nvPr/>
+        </p:nvSpPr>
+        <p:spPr>
+          <a:xfrm>
+            <a:off x="304800" y="8343900"/>
+            <a:ext cx="14630400" cy="190500"/>
+          </a:xfrm>
+          <a:prstGeom prst="rect">
+            <a:avLst/>
+          </a:prstGeom>
+          <a:noFill/>
+        </p:spPr>
+        <p:txBody>
+          <a:bodyPr wrap="square" lIns="0" rIns="0" tIns="0" bIns="0">
+            <a:spAutoFit/>
+          </a:bodyPr>
+          <a:lstStyle/>
+          <a:p>
+            <a:pPr algn="l"/>
+            <a:r>
+              <a:rPr sz="900" b="0">
+                <a:solidFill>
+                  <a:srgbClr val="6B7280"/>
+                </a:solidFill>
+              </a:rPr>
+              <a:t>Analytics Dashboard / Confidential</a:t>
             </a:r>
           </a:p>
         </p:txBody>
@@ -18453,9 +18929,43 @@
           </a:p>
         </p:txBody>
       </p:sp>
+      <p:sp>
+        <p:nvSpPr>
+          <p:cNvPr id="3" name="TextBox 2"/>
+          <p:cNvSpPr txBox="1"/>
+          <p:nvPr/>
+        </p:nvSpPr>
+        <p:spPr>
+          <a:xfrm>
+            <a:off x="304800" y="571500"/>
+            <a:ext cx="14630400" cy="228600"/>
+          </a:xfrm>
+          <a:prstGeom prst="rect">
+            <a:avLst/>
+          </a:prstGeom>
+          <a:noFill/>
+        </p:spPr>
+        <p:txBody>
+          <a:bodyPr wrap="square" lIns="0" rIns="0" tIns="0" bIns="0">
+            <a:spAutoFit/>
+          </a:bodyPr>
+          <a:lstStyle/>
+          <a:p>
+            <a:pPr algn="l"/>
+            <a:r>
+              <a:rPr sz="1100" b="0">
+                <a:solidFill>
+                  <a:srgbClr val="6B7280"/>
+                </a:solidFill>
+              </a:rPr>
+              <a:t>Effective: 2026-04-01 | Source: HRIS 2026-03-31 | ※ 2020 年以降の社員のみ表示</a:t>
+            </a:r>
+          </a:p>
+        </p:txBody>
+      </p:sp>
       <p:cxnSp>
         <p:nvCxnSpPr>
-          <p:cNvPr id="3" name="Connector 2"/>
+          <p:cNvPr id="4" name="Connector 3"/>
           <p:cNvCxnSpPr/>
           <p:nvPr/>
         </p:nvCxnSpPr>
@@ -18490,7 +19000,7 @@
       </p:cxnSp>
       <p:sp>
         <p:nvSpPr>
-          <p:cNvPr id="4" name="Rectangle 3"/>
+          <p:cNvPr id="5" name="Rectangle 4"/>
           <p:cNvSpPr/>
           <p:nvPr/>
         </p:nvSpPr>
@@ -18535,7 +19045,7 @@
       </p:sp>
       <p:sp>
         <p:nvSpPr>
-          <p:cNvPr id="5" name="Oval 4"/>
+          <p:cNvPr id="6" name="Oval 5"/>
           <p:cNvSpPr/>
           <p:nvPr/>
         </p:nvSpPr>
@@ -18580,7 +19090,7 @@
       </p:sp>
       <p:sp>
         <p:nvSpPr>
-          <p:cNvPr id="6" name="TextBox 5"/>
+          <p:cNvPr id="7" name="TextBox 6"/>
           <p:cNvSpPr txBox="1"/>
           <p:nvPr/>
         </p:nvSpPr>
@@ -18614,7 +19124,7 @@
       </p:sp>
       <p:sp>
         <p:nvSpPr>
-          <p:cNvPr id="7" name="TextBox 6"/>
+          <p:cNvPr id="8" name="TextBox 7"/>
           <p:cNvSpPr txBox="1"/>
           <p:nvPr/>
         </p:nvSpPr>
@@ -18648,7 +19158,7 @@
       </p:sp>
       <p:sp>
         <p:nvSpPr>
-          <p:cNvPr id="8" name="Rectangle 7"/>
+          <p:cNvPr id="9" name="Rectangle 8"/>
           <p:cNvSpPr/>
           <p:nvPr/>
         </p:nvSpPr>
@@ -18693,7 +19203,7 @@
       </p:sp>
       <p:sp>
         <p:nvSpPr>
-          <p:cNvPr id="9" name="Oval 8"/>
+          <p:cNvPr id="10" name="Oval 9"/>
           <p:cNvSpPr/>
           <p:nvPr/>
         </p:nvSpPr>
@@ -18738,7 +19248,7 @@
       </p:sp>
       <p:sp>
         <p:nvSpPr>
-          <p:cNvPr id="10" name="TextBox 9"/>
+          <p:cNvPr id="11" name="TextBox 10"/>
           <p:cNvSpPr txBox="1"/>
           <p:nvPr/>
         </p:nvSpPr>
@@ -18772,7 +19282,7 @@
       </p:sp>
       <p:sp>
         <p:nvSpPr>
-          <p:cNvPr id="11" name="TextBox 10"/>
+          <p:cNvPr id="12" name="TextBox 11"/>
           <p:cNvSpPr txBox="1"/>
           <p:nvPr/>
         </p:nvSpPr>
@@ -18806,7 +19316,7 @@
       </p:sp>
       <p:sp>
         <p:nvSpPr>
-          <p:cNvPr id="12" name="Rectangle 11"/>
+          <p:cNvPr id="13" name="Rectangle 12"/>
           <p:cNvSpPr/>
           <p:nvPr/>
         </p:nvSpPr>
@@ -18851,7 +19361,7 @@
       </p:sp>
       <p:sp>
         <p:nvSpPr>
-          <p:cNvPr id="13" name="Oval 12"/>
+          <p:cNvPr id="14" name="Oval 13"/>
           <p:cNvSpPr/>
           <p:nvPr/>
         </p:nvSpPr>
@@ -18896,7 +19406,7 @@
       </p:sp>
       <p:sp>
         <p:nvSpPr>
-          <p:cNvPr id="14" name="TextBox 13"/>
+          <p:cNvPr id="15" name="TextBox 14"/>
           <p:cNvSpPr txBox="1"/>
           <p:nvPr/>
         </p:nvSpPr>
@@ -18930,7 +19440,7 @@
       </p:sp>
       <p:sp>
         <p:nvSpPr>
-          <p:cNvPr id="15" name="TextBox 14"/>
+          <p:cNvPr id="16" name="TextBox 15"/>
           <p:cNvSpPr txBox="1"/>
           <p:nvPr/>
         </p:nvSpPr>
@@ -18964,7 +19474,7 @@
       </p:sp>
       <p:sp>
         <p:nvSpPr>
-          <p:cNvPr id="16" name="Rectangle 15"/>
+          <p:cNvPr id="17" name="Rectangle 16"/>
           <p:cNvSpPr/>
           <p:nvPr/>
         </p:nvSpPr>
@@ -19009,7 +19519,7 @@
       </p:sp>
       <p:sp>
         <p:nvSpPr>
-          <p:cNvPr id="17" name="Oval 16"/>
+          <p:cNvPr id="18" name="Oval 17"/>
           <p:cNvSpPr/>
           <p:nvPr/>
         </p:nvSpPr>
@@ -19054,7 +19564,7 @@
       </p:sp>
       <p:sp>
         <p:nvSpPr>
-          <p:cNvPr id="18" name="TextBox 17"/>
+          <p:cNvPr id="19" name="TextBox 18"/>
           <p:cNvSpPr txBox="1"/>
           <p:nvPr/>
         </p:nvSpPr>
@@ -19088,7 +19598,7 @@
       </p:sp>
       <p:sp>
         <p:nvSpPr>
-          <p:cNvPr id="19" name="TextBox 18"/>
+          <p:cNvPr id="20" name="TextBox 19"/>
           <p:cNvSpPr txBox="1"/>
           <p:nvPr/>
         </p:nvSpPr>
@@ -19122,7 +19632,7 @@
       </p:sp>
       <p:sp>
         <p:nvSpPr>
-          <p:cNvPr id="20" name="Rectangle 19"/>
+          <p:cNvPr id="21" name="Rectangle 20"/>
           <p:cNvSpPr/>
           <p:nvPr/>
         </p:nvSpPr>
@@ -19167,7 +19677,7 @@
       </p:sp>
       <p:sp>
         <p:nvSpPr>
-          <p:cNvPr id="21" name="Oval 20"/>
+          <p:cNvPr id="22" name="Oval 21"/>
           <p:cNvSpPr/>
           <p:nvPr/>
         </p:nvSpPr>
@@ -19212,7 +19722,7 @@
       </p:sp>
       <p:sp>
         <p:nvSpPr>
-          <p:cNvPr id="22" name="TextBox 21"/>
+          <p:cNvPr id="23" name="TextBox 22"/>
           <p:cNvSpPr txBox="1"/>
           <p:nvPr/>
         </p:nvSpPr>
@@ -19246,7 +19756,7 @@
       </p:sp>
       <p:sp>
         <p:nvSpPr>
-          <p:cNvPr id="23" name="TextBox 22"/>
+          <p:cNvPr id="24" name="TextBox 23"/>
           <p:cNvSpPr txBox="1"/>
           <p:nvPr/>
         </p:nvSpPr>
@@ -19280,7 +19790,7 @@
       </p:sp>
       <p:sp>
         <p:nvSpPr>
-          <p:cNvPr id="24" name="Rectangle 23"/>
+          <p:cNvPr id="25" name="Rectangle 24"/>
           <p:cNvSpPr/>
           <p:nvPr/>
         </p:nvSpPr>
@@ -19325,7 +19835,7 @@
       </p:sp>
       <p:sp>
         <p:nvSpPr>
-          <p:cNvPr id="25" name="Oval 24"/>
+          <p:cNvPr id="26" name="Oval 25"/>
           <p:cNvSpPr/>
           <p:nvPr/>
         </p:nvSpPr>
@@ -19370,7 +19880,7 @@
       </p:sp>
       <p:sp>
         <p:nvSpPr>
-          <p:cNvPr id="26" name="TextBox 25"/>
+          <p:cNvPr id="27" name="TextBox 26"/>
           <p:cNvSpPr txBox="1"/>
           <p:nvPr/>
         </p:nvSpPr>
@@ -19404,7 +19914,7 @@
       </p:sp>
       <p:sp>
         <p:nvSpPr>
-          <p:cNvPr id="27" name="TextBox 26"/>
+          <p:cNvPr id="28" name="TextBox 27"/>
           <p:cNvSpPr txBox="1"/>
           <p:nvPr/>
         </p:nvSpPr>
@@ -19438,7 +19948,7 @@
       </p:sp>
       <p:sp>
         <p:nvSpPr>
-          <p:cNvPr id="28" name="Rectangle 27"/>
+          <p:cNvPr id="29" name="Rectangle 28"/>
           <p:cNvSpPr/>
           <p:nvPr/>
         </p:nvSpPr>
@@ -19483,7 +19993,7 @@
       </p:sp>
       <p:sp>
         <p:nvSpPr>
-          <p:cNvPr id="29" name="Oval 28"/>
+          <p:cNvPr id="30" name="Oval 29"/>
           <p:cNvSpPr/>
           <p:nvPr/>
         </p:nvSpPr>
@@ -19528,7 +20038,7 @@
       </p:sp>
       <p:sp>
         <p:nvSpPr>
-          <p:cNvPr id="30" name="TextBox 29"/>
+          <p:cNvPr id="31" name="TextBox 30"/>
           <p:cNvSpPr txBox="1"/>
           <p:nvPr/>
         </p:nvSpPr>
@@ -19562,7 +20072,7 @@
       </p:sp>
       <p:sp>
         <p:nvSpPr>
-          <p:cNvPr id="31" name="TextBox 30"/>
+          <p:cNvPr id="32" name="TextBox 31"/>
           <p:cNvSpPr txBox="1"/>
           <p:nvPr/>
         </p:nvSpPr>
@@ -19596,7 +20106,7 @@
       </p:sp>
       <p:sp>
         <p:nvSpPr>
-          <p:cNvPr id="32" name="Rectangle 31"/>
+          <p:cNvPr id="33" name="Rectangle 32"/>
           <p:cNvSpPr/>
           <p:nvPr/>
         </p:nvSpPr>
@@ -19641,7 +20151,7 @@
       </p:sp>
       <p:sp>
         <p:nvSpPr>
-          <p:cNvPr id="33" name="Oval 32"/>
+          <p:cNvPr id="34" name="Oval 33"/>
           <p:cNvSpPr/>
           <p:nvPr/>
         </p:nvSpPr>
@@ -19686,7 +20196,7 @@
       </p:sp>
       <p:sp>
         <p:nvSpPr>
-          <p:cNvPr id="34" name="TextBox 33"/>
+          <p:cNvPr id="35" name="TextBox 34"/>
           <p:cNvSpPr txBox="1"/>
           <p:nvPr/>
         </p:nvSpPr>
@@ -19720,7 +20230,7 @@
       </p:sp>
       <p:sp>
         <p:nvSpPr>
-          <p:cNvPr id="35" name="TextBox 34"/>
+          <p:cNvPr id="36" name="TextBox 35"/>
           <p:cNvSpPr txBox="1"/>
           <p:nvPr/>
         </p:nvSpPr>
@@ -19754,7 +20264,7 @@
       </p:sp>
       <p:sp>
         <p:nvSpPr>
-          <p:cNvPr id="36" name="Rectangle 35"/>
+          <p:cNvPr id="37" name="Rectangle 36"/>
           <p:cNvSpPr/>
           <p:nvPr/>
         </p:nvSpPr>
@@ -19799,7 +20309,7 @@
       </p:sp>
       <p:sp>
         <p:nvSpPr>
-          <p:cNvPr id="37" name="Oval 36"/>
+          <p:cNvPr id="38" name="Oval 37"/>
           <p:cNvSpPr/>
           <p:nvPr/>
         </p:nvSpPr>
@@ -19844,7 +20354,7 @@
       </p:sp>
       <p:sp>
         <p:nvSpPr>
-          <p:cNvPr id="38" name="TextBox 37"/>
+          <p:cNvPr id="39" name="TextBox 38"/>
           <p:cNvSpPr txBox="1"/>
           <p:nvPr/>
         </p:nvSpPr>
@@ -19878,7 +20388,7 @@
       </p:sp>
       <p:sp>
         <p:nvSpPr>
-          <p:cNvPr id="39" name="TextBox 38"/>
+          <p:cNvPr id="40" name="TextBox 39"/>
           <p:cNvSpPr txBox="1"/>
           <p:nvPr/>
         </p:nvSpPr>
@@ -19912,7 +20422,7 @@
       </p:sp>
       <p:sp>
         <p:nvSpPr>
-          <p:cNvPr id="40" name="Rectangle 39"/>
+          <p:cNvPr id="41" name="Rectangle 40"/>
           <p:cNvSpPr/>
           <p:nvPr/>
         </p:nvSpPr>
@@ -19957,7 +20467,7 @@
       </p:sp>
       <p:sp>
         <p:nvSpPr>
-          <p:cNvPr id="41" name="Oval 40"/>
+          <p:cNvPr id="42" name="Oval 41"/>
           <p:cNvSpPr/>
           <p:nvPr/>
         </p:nvSpPr>
@@ -20002,7 +20512,7 @@
       </p:sp>
       <p:sp>
         <p:nvSpPr>
-          <p:cNvPr id="42" name="TextBox 41"/>
+          <p:cNvPr id="43" name="TextBox 42"/>
           <p:cNvSpPr txBox="1"/>
           <p:nvPr/>
         </p:nvSpPr>
@@ -20036,7 +20546,7 @@
       </p:sp>
       <p:sp>
         <p:nvSpPr>
-          <p:cNvPr id="43" name="TextBox 42"/>
+          <p:cNvPr id="44" name="TextBox 43"/>
           <p:cNvSpPr txBox="1"/>
           <p:nvPr/>
         </p:nvSpPr>
@@ -20068,41 +20578,6 @@
           </a:p>
         </p:txBody>
       </p:sp>
-      <p:cxnSp>
-        <p:nvCxnSpPr>
-          <p:cNvPr id="44" name="Connector 43"/>
-          <p:cNvCxnSpPr/>
-          <p:nvPr/>
-        </p:nvCxnSpPr>
-        <p:spPr>
-          <a:xfrm>
-            <a:off x="7620000" y="2476500"/>
-            <a:ext cx="0" cy="333375"/>
-          </a:xfrm>
-          <a:prstGeom prst="line">
-            <a:avLst/>
-          </a:prstGeom>
-          <a:ln w="22225">
-            <a:solidFill>
-              <a:srgbClr val="111827"/>
-            </a:solidFill>
-          </a:ln>
-        </p:spPr>
-        <p:style>
-          <a:lnRef idx="2">
-            <a:schemeClr val="accent1"/>
-          </a:lnRef>
-          <a:fillRef idx="0">
-            <a:schemeClr val="accent1"/>
-          </a:fillRef>
-          <a:effectRef idx="1">
-            <a:schemeClr val="accent1"/>
-          </a:effectRef>
-          <a:fontRef idx="minor">
-            <a:schemeClr val="tx1"/>
-          </a:fontRef>
-        </p:style>
-      </p:cxnSp>
       <p:cxnSp>
         <p:nvCxnSpPr>
           <p:cNvPr id="45" name="Connector 44"/>
@@ -20110,9 +20585,9 @@
           <p:nvPr/>
         </p:nvCxnSpPr>
         <p:spPr>
-          <a:xfrm flipH="1">
-            <a:off x="5524500" y="2809875"/>
-            <a:ext cx="2095500" cy="0"/>
+          <a:xfrm>
+            <a:off x="7620000" y="2476500"/>
+            <a:ext cx="0" cy="333375"/>
           </a:xfrm>
           <a:prstGeom prst="line">
             <a:avLst/>
@@ -20145,9 +20620,9 @@
           <p:nvPr/>
         </p:nvCxnSpPr>
         <p:spPr>
-          <a:xfrm>
+          <a:xfrm flipH="1">
             <a:off x="5524500" y="2809875"/>
-            <a:ext cx="0" cy="333375"/>
+            <a:ext cx="2095500" cy="0"/>
           </a:xfrm>
           <a:prstGeom prst="line">
             <a:avLst/>
@@ -20181,7 +20656,7 @@
         </p:nvCxnSpPr>
         <p:spPr>
           <a:xfrm>
-            <a:off x="7620000" y="2476500"/>
+            <a:off x="5524500" y="2809875"/>
             <a:ext cx="0" cy="333375"/>
           </a:xfrm>
           <a:prstGeom prst="line">
@@ -20216,8 +20691,8 @@
         </p:nvCxnSpPr>
         <p:spPr>
           <a:xfrm>
-            <a:off x="7620000" y="2809875"/>
-            <a:ext cx="0" cy="0"/>
+            <a:off x="7620000" y="2476500"/>
+            <a:ext cx="0" cy="333375"/>
           </a:xfrm>
           <a:prstGeom prst="line">
             <a:avLst/>
@@ -20252,7 +20727,7 @@
         <p:spPr>
           <a:xfrm>
             <a:off x="7620000" y="2809875"/>
-            <a:ext cx="0" cy="333375"/>
+            <a:ext cx="0" cy="0"/>
           </a:xfrm>
           <a:prstGeom prst="line">
             <a:avLst/>
@@ -20286,7 +20761,7 @@
         </p:nvCxnSpPr>
         <p:spPr>
           <a:xfrm>
-            <a:off x="7620000" y="2476500"/>
+            <a:off x="7620000" y="2809875"/>
             <a:ext cx="0" cy="333375"/>
           </a:xfrm>
           <a:prstGeom prst="line">
@@ -20321,8 +20796,8 @@
         </p:nvCxnSpPr>
         <p:spPr>
           <a:xfrm>
-            <a:off x="7620000" y="2809875"/>
-            <a:ext cx="2095500" cy="0"/>
+            <a:off x="7620000" y="2476500"/>
+            <a:ext cx="0" cy="333375"/>
           </a:xfrm>
           <a:prstGeom prst="line">
             <a:avLst/>
@@ -20356,8 +20831,8 @@
         </p:nvCxnSpPr>
         <p:spPr>
           <a:xfrm>
-            <a:off x="9715500" y="2809875"/>
-            <a:ext cx="0" cy="333375"/>
+            <a:off x="7620000" y="2809875"/>
+            <a:ext cx="2095500" cy="0"/>
           </a:xfrm>
           <a:prstGeom prst="line">
             <a:avLst/>
@@ -20391,8 +20866,8 @@
         </p:nvCxnSpPr>
         <p:spPr>
           <a:xfrm>
-            <a:off x="5524500" y="4286250"/>
-            <a:ext cx="0" cy="619125"/>
+            <a:off x="9715500" y="2809875"/>
+            <a:ext cx="0" cy="333375"/>
           </a:xfrm>
           <a:prstGeom prst="line">
             <a:avLst/>
@@ -20425,9 +20900,9 @@
           <p:nvPr/>
         </p:nvCxnSpPr>
         <p:spPr>
-          <a:xfrm flipH="1">
-            <a:off x="2381250" y="4905375"/>
-            <a:ext cx="3143250" cy="0"/>
+          <a:xfrm>
+            <a:off x="5524500" y="4286250"/>
+            <a:ext cx="0" cy="619125"/>
           </a:xfrm>
           <a:prstGeom prst="line">
             <a:avLst/>
@@ -20460,9 +20935,9 @@
           <p:nvPr/>
         </p:nvCxnSpPr>
         <p:spPr>
-          <a:xfrm>
+          <a:xfrm flipH="1">
             <a:off x="2381250" y="4905375"/>
-            <a:ext cx="0" cy="619125"/>
+            <a:ext cx="3143250" cy="0"/>
           </a:xfrm>
           <a:prstGeom prst="line">
             <a:avLst/>
@@ -20496,7 +20971,7 @@
         </p:nvCxnSpPr>
         <p:spPr>
           <a:xfrm>
-            <a:off x="5524500" y="4286250"/>
+            <a:off x="2381250" y="4905375"/>
             <a:ext cx="0" cy="619125"/>
           </a:xfrm>
           <a:prstGeom prst="line">
@@ -20530,9 +21005,9 @@
           <p:nvPr/>
         </p:nvCxnSpPr>
         <p:spPr>
-          <a:xfrm flipH="1">
-            <a:off x="4476750" y="4905375"/>
-            <a:ext cx="1047750" cy="0"/>
+          <a:xfrm>
+            <a:off x="5524500" y="4286250"/>
+            <a:ext cx="0" cy="619125"/>
           </a:xfrm>
           <a:prstGeom prst="line">
             <a:avLst/>
@@ -20565,9 +21040,9 @@
           <p:nvPr/>
         </p:nvCxnSpPr>
         <p:spPr>
-          <a:xfrm>
+          <a:xfrm flipH="1">
             <a:off x="4476750" y="4905375"/>
-            <a:ext cx="0" cy="619125"/>
+            <a:ext cx="1047750" cy="0"/>
           </a:xfrm>
           <a:prstGeom prst="line">
             <a:avLst/>
@@ -20601,7 +21076,7 @@
         </p:nvCxnSpPr>
         <p:spPr>
           <a:xfrm>
-            <a:off x="7620000" y="4286250"/>
+            <a:off x="4476750" y="4905375"/>
             <a:ext cx="0" cy="619125"/>
           </a:xfrm>
           <a:prstGeom prst="line">
@@ -20635,9 +21110,9 @@
           <p:nvPr/>
         </p:nvCxnSpPr>
         <p:spPr>
-          <a:xfrm flipH="1">
-            <a:off x="6572250" y="4905375"/>
-            <a:ext cx="1047750" cy="0"/>
+          <a:xfrm>
+            <a:off x="7620000" y="4286250"/>
+            <a:ext cx="0" cy="619125"/>
           </a:xfrm>
           <a:prstGeom prst="line">
             <a:avLst/>
@@ -20670,9 +21145,9 @@
           <p:nvPr/>
         </p:nvCxnSpPr>
         <p:spPr>
-          <a:xfrm>
+          <a:xfrm flipH="1">
             <a:off x="6572250" y="4905375"/>
-            <a:ext cx="0" cy="619125"/>
+            <a:ext cx="1047750" cy="0"/>
           </a:xfrm>
           <a:prstGeom prst="line">
             <a:avLst/>
@@ -20706,7 +21181,7 @@
         </p:nvCxnSpPr>
         <p:spPr>
           <a:xfrm>
-            <a:off x="7620000" y="4286250"/>
+            <a:off x="6572250" y="4905375"/>
             <a:ext cx="0" cy="619125"/>
           </a:xfrm>
           <a:prstGeom prst="line">
@@ -20741,8 +21216,8 @@
         </p:nvCxnSpPr>
         <p:spPr>
           <a:xfrm>
-            <a:off x="7620000" y="4905375"/>
-            <a:ext cx="1047750" cy="0"/>
+            <a:off x="7620000" y="4286250"/>
+            <a:ext cx="0" cy="619125"/>
           </a:xfrm>
           <a:prstGeom prst="line">
             <a:avLst/>
@@ -20776,8 +21251,8 @@
         </p:nvCxnSpPr>
         <p:spPr>
           <a:xfrm>
-            <a:off x="8667750" y="4905375"/>
-            <a:ext cx="0" cy="619125"/>
+            <a:off x="7620000" y="4905375"/>
+            <a:ext cx="1047750" cy="0"/>
           </a:xfrm>
           <a:prstGeom prst="line">
             <a:avLst/>
@@ -20811,7 +21286,7 @@
         </p:nvCxnSpPr>
         <p:spPr>
           <a:xfrm>
-            <a:off x="9715500" y="4286250"/>
+            <a:off x="8667750" y="4905375"/>
             <a:ext cx="0" cy="619125"/>
           </a:xfrm>
           <a:prstGeom prst="line">
@@ -20846,8 +21321,8 @@
         </p:nvCxnSpPr>
         <p:spPr>
           <a:xfrm>
-            <a:off x="9715500" y="4905375"/>
-            <a:ext cx="1047750" cy="0"/>
+            <a:off x="9715500" y="4286250"/>
+            <a:ext cx="0" cy="619125"/>
           </a:xfrm>
           <a:prstGeom prst="line">
             <a:avLst/>
@@ -20881,8 +21356,8 @@
         </p:nvCxnSpPr>
         <p:spPr>
           <a:xfrm>
-            <a:off x="10763250" y="4905375"/>
-            <a:ext cx="0" cy="619125"/>
+            <a:off x="9715500" y="4905375"/>
+            <a:ext cx="1047750" cy="0"/>
           </a:xfrm>
           <a:prstGeom prst="line">
             <a:avLst/>
@@ -20916,7 +21391,7 @@
         </p:nvCxnSpPr>
         <p:spPr>
           <a:xfrm>
-            <a:off x="9715500" y="4286250"/>
+            <a:off x="10763250" y="4905375"/>
             <a:ext cx="0" cy="619125"/>
           </a:xfrm>
           <a:prstGeom prst="line">
@@ -20951,8 +21426,8 @@
         </p:nvCxnSpPr>
         <p:spPr>
           <a:xfrm>
-            <a:off x="9715500" y="4905375"/>
-            <a:ext cx="3143250" cy="0"/>
+            <a:off x="9715500" y="4286250"/>
+            <a:ext cx="0" cy="619125"/>
           </a:xfrm>
           <a:prstGeom prst="line">
             <a:avLst/>
@@ -20986,6 +21461,41 @@
         </p:nvCxnSpPr>
         <p:spPr>
           <a:xfrm>
+            <a:off x="9715500" y="4905375"/>
+            <a:ext cx="3143250" cy="0"/>
+          </a:xfrm>
+          <a:prstGeom prst="line">
+            <a:avLst/>
+          </a:prstGeom>
+          <a:ln w="22225">
+            <a:solidFill>
+              <a:srgbClr val="111827"/>
+            </a:solidFill>
+          </a:ln>
+        </p:spPr>
+        <p:style>
+          <a:lnRef idx="2">
+            <a:schemeClr val="accent1"/>
+          </a:lnRef>
+          <a:fillRef idx="0">
+            <a:schemeClr val="accent1"/>
+          </a:fillRef>
+          <a:effectRef idx="1">
+            <a:schemeClr val="accent1"/>
+          </a:effectRef>
+          <a:fontRef idx="minor">
+            <a:schemeClr val="tx1"/>
+          </a:fontRef>
+        </p:style>
+      </p:cxnSp>
+      <p:cxnSp>
+        <p:nvCxnSpPr>
+          <p:cNvPr id="71" name="Connector 70"/>
+          <p:cNvCxnSpPr/>
+          <p:nvPr/>
+        </p:nvCxnSpPr>
+        <p:spPr>
+          <a:xfrm>
             <a:off x="12858750" y="4905375"/>
             <a:ext cx="0" cy="619125"/>
           </a:xfrm>
@@ -21013,6 +21523,40 @@
           </a:fontRef>
         </p:style>
       </p:cxnSp>
+      <p:sp>
+        <p:nvSpPr>
+          <p:cNvPr id="72" name="TextBox 71"/>
+          <p:cNvSpPr txBox="1"/>
+          <p:nvPr/>
+        </p:nvSpPr>
+        <p:spPr>
+          <a:xfrm>
+            <a:off x="304800" y="8343900"/>
+            <a:ext cx="14630400" cy="190500"/>
+          </a:xfrm>
+          <a:prstGeom prst="rect">
+            <a:avLst/>
+          </a:prstGeom>
+          <a:noFill/>
+        </p:spPr>
+        <p:txBody>
+          <a:bodyPr wrap="square" lIns="0" rIns="0" tIns="0" bIns="0">
+            <a:spAutoFit/>
+          </a:bodyPr>
+          <a:lstStyle/>
+          <a:p>
+            <a:pPr algn="l"/>
+            <a:r>
+              <a:rPr sz="900" b="0">
+                <a:solidFill>
+                  <a:srgbClr val="6B7280"/>
+                </a:solidFill>
+              </a:rPr>
+              <a:t>HR Org Chart / Effective 2026-04-01</a:t>
+            </a:r>
+          </a:p>
+        </p:txBody>
+      </p:sp>
     </p:spTree>
   </p:cSld>
   <p:clrMapOvr>
